--- a/Python2_T2/Decision_Tree.pptx
+++ b/Python2_T2/Decision_Tree.pptx
@@ -2,7 +2,7 @@
 <file path=ppt/presentation.xml><?xml version="1.0" encoding="utf-8"?>
 <p:presentation xmlns:a="http://schemas.openxmlformats.org/drawingml/2006/main" xmlns:r="http://schemas.openxmlformats.org/officeDocument/2006/relationships" xmlns:mc="http://schemas.openxmlformats.org/markup-compatibility/2006" xmlns:mv="urn:schemas-microsoft-com:mac:vml" xmlns:p="http://schemas.openxmlformats.org/presentationml/2006/main" xmlns:c="http://schemas.openxmlformats.org/drawingml/2006/chart" xmlns:dgm="http://schemas.openxmlformats.org/drawingml/2006/diagram" xmlns:o="urn:schemas-microsoft-com:office:office" xmlns:v="urn:schemas-microsoft-com:vml" xmlns:pvml="urn:schemas-microsoft-com:office:powerpoint" xmlns:com="http://schemas.openxmlformats.org/drawingml/2006/compatibility" xmlns:p14="http://schemas.microsoft.com/office/powerpoint/2010/main" xmlns:p15="http://schemas.microsoft.com/office/powerpoint/2012/main" xmlns:ahyp="http://schemas.microsoft.com/office/drawing/2018/hyperlinkcolor" autoCompressPictures="0" embedTrueTypeFonts="1" strictFirstAndLastChars="0" saveSubsetFonts="1">
   <p:sldMasterIdLst>
-    <p:sldMasterId id="2147483659" r:id="rId4"/>
+    <p:sldMasterId id="2147483648" r:id="rId4"/>
   </p:sldMasterIdLst>
   <p:notesMasterIdLst>
     <p:notesMasterId r:id="rId5"/>
@@ -292,6 +292,9 @@
           </p15:clr>
         </p15:guide>
       </p15:sldGuideLst>
+    </p:ext>
+    <p:ext uri="GoogleSlidesCustomDataVersion2">
+      <go:slidesCustomData xmlns:go="http://customooxmlschemas.google.com/" r:id="rId33" roundtripDataSignature="AMtx7mg+kZFM6pppJ8+FgS6QJswoqWCtMg=="/>
     </p:ext>
   </p:extLst>
 </p:presentation>
@@ -2639,7 +2642,7 @@
       </p:grpSpPr>
       <p:sp>
         <p:nvSpPr>
-          <p:cNvPr id="10" name="Google Shape;10;p2"/>
+          <p:cNvPr id="10" name="Google Shape;10;p19"/>
           <p:cNvSpPr/>
           <p:nvPr/>
         </p:nvSpPr>
@@ -2678,7 +2681,7 @@
       </p:sp>
       <p:sp>
         <p:nvSpPr>
-          <p:cNvPr id="11" name="Google Shape;11;p2"/>
+          <p:cNvPr id="11" name="Google Shape;11;p19"/>
           <p:cNvSpPr txBox="1"/>
           <p:nvPr>
             <p:ph type="ctrTitle"/>
@@ -2834,7 +2837,7 @@
       </p:sp>
       <p:sp>
         <p:nvSpPr>
-          <p:cNvPr id="12" name="Google Shape;12;p2"/>
+          <p:cNvPr id="12" name="Google Shape;12;p19"/>
           <p:cNvSpPr txBox="1"/>
           <p:nvPr>
             <p:ph idx="1" type="subTitle"/>
@@ -3053,7 +3056,7 @@
       </p:sp>
       <p:sp>
         <p:nvSpPr>
-          <p:cNvPr id="13" name="Google Shape;13;p2"/>
+          <p:cNvPr id="13" name="Google Shape;13;p19"/>
           <p:cNvSpPr txBox="1"/>
           <p:nvPr>
             <p:ph idx="12" type="sldNum"/>
@@ -3364,7 +3367,7 @@
       </p:grpSpPr>
       <p:sp>
         <p:nvSpPr>
-          <p:cNvPr id="55" name="Google Shape;55;p11"/>
+          <p:cNvPr id="55" name="Google Shape;55;p28"/>
           <p:cNvSpPr txBox="1"/>
           <p:nvPr>
             <p:ph hasCustomPrompt="1" type="title"/>
@@ -3587,7 +3590,7 @@
       </p:sp>
       <p:sp>
         <p:nvSpPr>
-          <p:cNvPr id="56" name="Google Shape;56;p11"/>
+          <p:cNvPr id="56" name="Google Shape;56;p28"/>
           <p:cNvSpPr txBox="1"/>
           <p:nvPr>
             <p:ph idx="1" type="body"/>
@@ -3806,7 +3809,7 @@
       </p:sp>
       <p:sp>
         <p:nvSpPr>
-          <p:cNvPr id="57" name="Google Shape;57;p11"/>
+          <p:cNvPr id="57" name="Google Shape;57;p28"/>
           <p:cNvSpPr txBox="1"/>
           <p:nvPr>
             <p:ph idx="12" type="sldNum"/>
@@ -4110,7 +4113,7 @@
       </p:grpSpPr>
       <p:sp>
         <p:nvSpPr>
-          <p:cNvPr id="59" name="Google Shape;59;p12"/>
+          <p:cNvPr id="59" name="Google Shape;59;p29"/>
           <p:cNvSpPr txBox="1"/>
           <p:nvPr>
             <p:ph idx="12" type="sldNum"/>
@@ -4414,7 +4417,7 @@
       </p:grpSpPr>
       <p:sp>
         <p:nvSpPr>
-          <p:cNvPr id="15" name="Google Shape;15;p3"/>
+          <p:cNvPr id="15" name="Google Shape;15;p20"/>
           <p:cNvSpPr/>
           <p:nvPr/>
         </p:nvSpPr>
@@ -4473,7 +4476,7 @@
       </p:sp>
       <p:sp>
         <p:nvSpPr>
-          <p:cNvPr id="16" name="Google Shape;16;p3"/>
+          <p:cNvPr id="16" name="Google Shape;16;p20"/>
           <p:cNvSpPr txBox="1"/>
           <p:nvPr>
             <p:ph type="title"/>
@@ -4692,7 +4695,7 @@
       </p:sp>
       <p:sp>
         <p:nvSpPr>
-          <p:cNvPr id="17" name="Google Shape;17;p3"/>
+          <p:cNvPr id="17" name="Google Shape;17;p20"/>
           <p:cNvSpPr txBox="1"/>
           <p:nvPr>
             <p:ph idx="12" type="sldNum"/>
@@ -5003,7 +5006,7 @@
       </p:grpSpPr>
       <p:sp>
         <p:nvSpPr>
-          <p:cNvPr id="19" name="Google Shape;19;p4"/>
+          <p:cNvPr id="19" name="Google Shape;19;p21"/>
           <p:cNvSpPr/>
           <p:nvPr/>
         </p:nvSpPr>
@@ -5042,7 +5045,7 @@
       </p:sp>
       <p:sp>
         <p:nvSpPr>
-          <p:cNvPr id="20" name="Google Shape;20;p4"/>
+          <p:cNvPr id="20" name="Google Shape;20;p21"/>
           <p:cNvSpPr/>
           <p:nvPr/>
         </p:nvSpPr>
@@ -5081,7 +5084,7 @@
       </p:sp>
       <p:sp>
         <p:nvSpPr>
-          <p:cNvPr id="21" name="Google Shape;21;p4"/>
+          <p:cNvPr id="21" name="Google Shape;21;p21"/>
           <p:cNvSpPr txBox="1"/>
           <p:nvPr>
             <p:ph type="title"/>
@@ -5237,7 +5240,7 @@
       </p:sp>
       <p:sp>
         <p:nvSpPr>
-          <p:cNvPr id="22" name="Google Shape;22;p4"/>
+          <p:cNvPr id="22" name="Google Shape;22;p21"/>
           <p:cNvSpPr txBox="1"/>
           <p:nvPr>
             <p:ph idx="12" type="sldNum"/>
@@ -5541,7 +5544,7 @@
       </p:grpSpPr>
       <p:sp>
         <p:nvSpPr>
-          <p:cNvPr id="24" name="Google Shape;24;p5"/>
+          <p:cNvPr id="24" name="Google Shape;24;p22"/>
           <p:cNvSpPr/>
           <p:nvPr/>
         </p:nvSpPr>
@@ -5600,7 +5603,7 @@
       </p:sp>
       <p:sp>
         <p:nvSpPr>
-          <p:cNvPr id="25" name="Google Shape;25;p5"/>
+          <p:cNvPr id="25" name="Google Shape;25;p22"/>
           <p:cNvSpPr/>
           <p:nvPr/>
         </p:nvSpPr>
@@ -5639,7 +5642,7 @@
       </p:sp>
       <p:sp>
         <p:nvSpPr>
-          <p:cNvPr id="26" name="Google Shape;26;p5"/>
+          <p:cNvPr id="26" name="Google Shape;26;p22"/>
           <p:cNvSpPr/>
           <p:nvPr/>
         </p:nvSpPr>
@@ -5678,7 +5681,7 @@
       </p:sp>
       <p:sp>
         <p:nvSpPr>
-          <p:cNvPr id="27" name="Google Shape;27;p5"/>
+          <p:cNvPr id="27" name="Google Shape;27;p22"/>
           <p:cNvSpPr txBox="1"/>
           <p:nvPr>
             <p:ph type="title"/>
@@ -5897,7 +5900,7 @@
       </p:sp>
       <p:sp>
         <p:nvSpPr>
-          <p:cNvPr id="28" name="Google Shape;28;p5"/>
+          <p:cNvPr id="28" name="Google Shape;28;p22"/>
           <p:cNvSpPr txBox="1"/>
           <p:nvPr>
             <p:ph idx="1" type="body"/>
@@ -6053,7 +6056,7 @@
       </p:sp>
       <p:sp>
         <p:nvSpPr>
-          <p:cNvPr id="29" name="Google Shape;29;p5"/>
+          <p:cNvPr id="29" name="Google Shape;29;p22"/>
           <p:cNvSpPr txBox="1"/>
           <p:nvPr>
             <p:ph idx="12" type="sldNum"/>
@@ -6357,7 +6360,7 @@
       </p:grpSpPr>
       <p:sp>
         <p:nvSpPr>
-          <p:cNvPr id="31" name="Google Shape;31;p6"/>
+          <p:cNvPr id="31" name="Google Shape;31;p23"/>
           <p:cNvSpPr/>
           <p:nvPr/>
         </p:nvSpPr>
@@ -6416,7 +6419,7 @@
       </p:sp>
       <p:sp>
         <p:nvSpPr>
-          <p:cNvPr id="32" name="Google Shape;32;p6"/>
+          <p:cNvPr id="32" name="Google Shape;32;p23"/>
           <p:cNvSpPr txBox="1"/>
           <p:nvPr>
             <p:ph type="title"/>
@@ -6635,7 +6638,7 @@
       </p:sp>
       <p:sp>
         <p:nvSpPr>
-          <p:cNvPr id="33" name="Google Shape;33;p6"/>
+          <p:cNvPr id="33" name="Google Shape;33;p23"/>
           <p:cNvSpPr txBox="1"/>
           <p:nvPr>
             <p:ph idx="1" type="body"/>
@@ -6791,7 +6794,7 @@
       </p:sp>
       <p:sp>
         <p:nvSpPr>
-          <p:cNvPr id="34" name="Google Shape;34;p6"/>
+          <p:cNvPr id="34" name="Google Shape;34;p23"/>
           <p:cNvSpPr txBox="1"/>
           <p:nvPr>
             <p:ph idx="2" type="body"/>
@@ -6947,7 +6950,7 @@
       </p:sp>
       <p:sp>
         <p:nvSpPr>
-          <p:cNvPr id="35" name="Google Shape;35;p6"/>
+          <p:cNvPr id="35" name="Google Shape;35;p23"/>
           <p:cNvSpPr txBox="1"/>
           <p:nvPr>
             <p:ph idx="12" type="sldNum"/>
@@ -7251,7 +7254,7 @@
       </p:grpSpPr>
       <p:sp>
         <p:nvSpPr>
-          <p:cNvPr id="37" name="Google Shape;37;p7"/>
+          <p:cNvPr id="37" name="Google Shape;37;p24"/>
           <p:cNvSpPr/>
           <p:nvPr/>
         </p:nvSpPr>
@@ -7310,7 +7313,7 @@
       </p:sp>
       <p:sp>
         <p:nvSpPr>
-          <p:cNvPr id="38" name="Google Shape;38;p7"/>
+          <p:cNvPr id="38" name="Google Shape;38;p24"/>
           <p:cNvSpPr txBox="1"/>
           <p:nvPr>
             <p:ph type="title"/>
@@ -7529,7 +7532,7 @@
       </p:sp>
       <p:sp>
         <p:nvSpPr>
-          <p:cNvPr id="39" name="Google Shape;39;p7"/>
+          <p:cNvPr id="39" name="Google Shape;39;p24"/>
           <p:cNvSpPr txBox="1"/>
           <p:nvPr>
             <p:ph idx="1" type="body"/>
@@ -7748,7 +7751,7 @@
       </p:sp>
       <p:sp>
         <p:nvSpPr>
-          <p:cNvPr id="40" name="Google Shape;40;p7"/>
+          <p:cNvPr id="40" name="Google Shape;40;p24"/>
           <p:cNvSpPr txBox="1"/>
           <p:nvPr>
             <p:ph idx="12" type="sldNum"/>
@@ -8059,7 +8062,7 @@
       </p:grpSpPr>
       <p:sp>
         <p:nvSpPr>
-          <p:cNvPr id="42" name="Google Shape;42;p8"/>
+          <p:cNvPr id="42" name="Google Shape;42;p25"/>
           <p:cNvSpPr txBox="1"/>
           <p:nvPr>
             <p:ph type="title"/>
@@ -8215,7 +8218,7 @@
       </p:sp>
       <p:sp>
         <p:nvSpPr>
-          <p:cNvPr id="43" name="Google Shape;43;p8"/>
+          <p:cNvPr id="43" name="Google Shape;43;p25"/>
           <p:cNvSpPr txBox="1"/>
           <p:nvPr>
             <p:ph idx="12" type="sldNum"/>
@@ -8519,7 +8522,7 @@
       </p:grpSpPr>
       <p:sp>
         <p:nvSpPr>
-          <p:cNvPr id="45" name="Google Shape;45;p9"/>
+          <p:cNvPr id="45" name="Google Shape;45;p26"/>
           <p:cNvSpPr/>
           <p:nvPr/>
         </p:nvSpPr>
@@ -8578,7 +8581,7 @@
       </p:sp>
       <p:sp>
         <p:nvSpPr>
-          <p:cNvPr id="46" name="Google Shape;46;p9"/>
+          <p:cNvPr id="46" name="Google Shape;46;p26"/>
           <p:cNvSpPr txBox="1"/>
           <p:nvPr>
             <p:ph type="title"/>
@@ -8797,7 +8800,7 @@
       </p:sp>
       <p:sp>
         <p:nvSpPr>
-          <p:cNvPr id="47" name="Google Shape;47;p9"/>
+          <p:cNvPr id="47" name="Google Shape;47;p26"/>
           <p:cNvSpPr txBox="1"/>
           <p:nvPr>
             <p:ph idx="1" type="subTitle"/>
@@ -9016,7 +9019,7 @@
       </p:sp>
       <p:sp>
         <p:nvSpPr>
-          <p:cNvPr id="48" name="Google Shape;48;p9"/>
+          <p:cNvPr id="48" name="Google Shape;48;p26"/>
           <p:cNvSpPr txBox="1"/>
           <p:nvPr>
             <p:ph idx="2" type="body"/>
@@ -9172,7 +9175,7 @@
       </p:sp>
       <p:sp>
         <p:nvSpPr>
-          <p:cNvPr id="49" name="Google Shape;49;p9"/>
+          <p:cNvPr id="49" name="Google Shape;49;p26"/>
           <p:cNvSpPr txBox="1"/>
           <p:nvPr>
             <p:ph idx="12" type="sldNum"/>
@@ -9476,7 +9479,7 @@
       </p:grpSpPr>
       <p:sp>
         <p:nvSpPr>
-          <p:cNvPr id="51" name="Google Shape;51;p10"/>
+          <p:cNvPr id="51" name="Google Shape;51;p27"/>
           <p:cNvSpPr/>
           <p:nvPr/>
         </p:nvSpPr>
@@ -9535,7 +9538,7 @@
       </p:sp>
       <p:sp>
         <p:nvSpPr>
-          <p:cNvPr id="52" name="Google Shape;52;p10"/>
+          <p:cNvPr id="52" name="Google Shape;52;p27"/>
           <p:cNvSpPr txBox="1"/>
           <p:nvPr>
             <p:ph idx="1" type="body"/>
@@ -9591,7 +9594,7 @@
       </p:sp>
       <p:sp>
         <p:nvSpPr>
-          <p:cNvPr id="53" name="Google Shape;53;p10"/>
+          <p:cNvPr id="53" name="Google Shape;53;p27"/>
           <p:cNvSpPr txBox="1"/>
           <p:nvPr>
             <p:ph idx="12" type="sldNum"/>
@@ -9902,7 +9905,7 @@
       </p:grpSpPr>
       <p:sp>
         <p:nvSpPr>
-          <p:cNvPr id="6" name="Google Shape;6;p1"/>
+          <p:cNvPr id="6" name="Google Shape;6;p18"/>
           <p:cNvSpPr txBox="1"/>
           <p:nvPr>
             <p:ph type="title"/>
@@ -10166,7 +10169,7 @@
       </p:sp>
       <p:sp>
         <p:nvSpPr>
-          <p:cNvPr id="7" name="Google Shape;7;p1"/>
+          <p:cNvPr id="7" name="Google Shape;7;p18"/>
           <p:cNvSpPr txBox="1"/>
           <p:nvPr>
             <p:ph idx="1" type="body"/>
@@ -10430,7 +10433,7 @@
       </p:sp>
       <p:sp>
         <p:nvSpPr>
-          <p:cNvPr id="8" name="Google Shape;8;p1"/>
+          <p:cNvPr id="8" name="Google Shape;8;p18"/>
           <p:cNvSpPr txBox="1"/>
           <p:nvPr>
             <p:ph idx="12" type="sldNum"/>
@@ -10711,17 +10714,17 @@
   </p:cSld>
   <p:clrMap accent1="accent1" accent2="accent2" accent3="accent3" accent4="accent4" accent5="accent5" accent6="accent6" bg1="lt1" bg2="dk2" tx1="dk1" tx2="lt2" folHlink="folHlink" hlink="hlink"/>
   <p:sldLayoutIdLst>
-    <p:sldLayoutId id="2147483648" r:id="rId1"/>
-    <p:sldLayoutId id="2147483649" r:id="rId2"/>
-    <p:sldLayoutId id="2147483650" r:id="rId3"/>
-    <p:sldLayoutId id="2147483651" r:id="rId4"/>
-    <p:sldLayoutId id="2147483652" r:id="rId5"/>
-    <p:sldLayoutId id="2147483653" r:id="rId6"/>
-    <p:sldLayoutId id="2147483654" r:id="rId7"/>
-    <p:sldLayoutId id="2147483655" r:id="rId8"/>
-    <p:sldLayoutId id="2147483656" r:id="rId9"/>
-    <p:sldLayoutId id="2147483657" r:id="rId10"/>
-    <p:sldLayoutId id="2147483658" r:id="rId11"/>
+    <p:sldLayoutId id="2147483649" r:id="rId1"/>
+    <p:sldLayoutId id="2147483650" r:id="rId2"/>
+    <p:sldLayoutId id="2147483651" r:id="rId3"/>
+    <p:sldLayoutId id="2147483652" r:id="rId4"/>
+    <p:sldLayoutId id="2147483653" r:id="rId5"/>
+    <p:sldLayoutId id="2147483654" r:id="rId6"/>
+    <p:sldLayoutId id="2147483655" r:id="rId7"/>
+    <p:sldLayoutId id="2147483656" r:id="rId8"/>
+    <p:sldLayoutId id="2147483657" r:id="rId9"/>
+    <p:sldLayoutId id="2147483658" r:id="rId10"/>
+    <p:sldLayoutId id="2147483659" r:id="rId11"/>
   </p:sldLayoutIdLst>
   <p:hf dt="0" ftr="0" hdr="0" sldNum="0"/>
   <p:txStyles>
@@ -11435,7 +11438,7 @@
       </p:grpSpPr>
       <p:sp>
         <p:nvSpPr>
-          <p:cNvPr id="64" name="Google Shape;64;p13"/>
+          <p:cNvPr id="64" name="Google Shape;64;p1"/>
           <p:cNvSpPr txBox="1"/>
           <p:nvPr>
             <p:ph type="ctrTitle"/>
@@ -11483,7 +11486,7 @@
       </p:sp>
       <p:sp>
         <p:nvSpPr>
-          <p:cNvPr id="65" name="Google Shape;65;p13"/>
+          <p:cNvPr id="65" name="Google Shape;65;p1"/>
           <p:cNvSpPr txBox="1"/>
           <p:nvPr/>
         </p:nvSpPr>
@@ -11574,7 +11577,7 @@
       </p:grpSpPr>
       <p:sp>
         <p:nvSpPr>
-          <p:cNvPr id="118" name="Google Shape;118;p22"/>
+          <p:cNvPr id="118" name="Google Shape;118;g3e04a08467b_0_14"/>
           <p:cNvSpPr txBox="1"/>
           <p:nvPr>
             <p:ph type="title"/>
@@ -11622,7 +11625,7 @@
       </p:sp>
       <p:sp>
         <p:nvSpPr>
-          <p:cNvPr id="119" name="Google Shape;119;p22"/>
+          <p:cNvPr id="119" name="Google Shape;119;g3e04a08467b_0_14"/>
           <p:cNvSpPr txBox="1"/>
           <p:nvPr/>
         </p:nvSpPr>
@@ -11645,7 +11648,7 @@
           </a:bodyPr>
           <a:lstStyle/>
           <a:p>
-            <a:pPr indent="0" lvl="0" marL="0" rtl="0" algn="l">
+            <a:pPr indent="0" lvl="0" marL="0" marR="0" rtl="0" algn="l">
               <a:lnSpc>
                 <a:spcPct val="120000"/>
               </a:lnSpc>
@@ -11655,10 +11658,15 @@
               <a:spcAft>
                 <a:spcPts val="0"/>
               </a:spcAft>
+              <a:buClr>
+                <a:srgbClr val="000000"/>
+              </a:buClr>
+              <a:buSzPts val="1800"/>
+              <a:buFont typeface="Arial"/>
               <a:buNone/>
             </a:pPr>
             <a:r>
-              <a:rPr b="1" lang="en" sz="1800">
+              <a:rPr b="1" i="0" lang="en" sz="1800" u="none" cap="none" strike="noStrike">
                 <a:solidFill>
                   <a:srgbClr val="273239"/>
                 </a:solidFill>
@@ -11669,7 +11677,7 @@
               </a:rPr>
               <a:t>1. Root Node (Income)</a:t>
             </a:r>
-            <a:endParaRPr b="1" sz="1800">
+            <a:endParaRPr b="1" i="0" sz="1800" u="none" cap="none" strike="noStrike">
               <a:solidFill>
                 <a:srgbClr val="273239"/>
               </a:solidFill>
@@ -11680,7 +11688,7 @@
             </a:endParaRPr>
           </a:p>
           <a:p>
-            <a:pPr indent="0" lvl="0" marL="0" rtl="0" algn="l">
+            <a:pPr indent="0" lvl="0" marL="0" marR="0" rtl="0" algn="l">
               <a:lnSpc>
                 <a:spcPct val="120000"/>
               </a:lnSpc>
@@ -11690,10 +11698,15 @@
               <a:spcAft>
                 <a:spcPts val="0"/>
               </a:spcAft>
+              <a:buClr>
+                <a:srgbClr val="000000"/>
+              </a:buClr>
+              <a:buSzPts val="1800"/>
+              <a:buFont typeface="Arial"/>
               <a:buNone/>
             </a:pPr>
             <a:r>
-              <a:rPr b="1" lang="en" sz="1800">
+              <a:rPr b="1" i="0" lang="en" sz="1800" u="none" cap="none" strike="noStrike">
                 <a:solidFill>
                   <a:srgbClr val="273239"/>
                 </a:solidFill>
@@ -11705,7 +11718,7 @@
               <a:t>First Question</a:t>
             </a:r>
             <a:r>
-              <a:rPr lang="en" sz="1800">
+              <a:rPr b="0" i="0" lang="en" sz="1800" u="none" cap="none" strike="noStrike">
                 <a:solidFill>
                   <a:srgbClr val="273239"/>
                 </a:solidFill>
@@ -11717,7 +11730,7 @@
               <a:t>: </a:t>
             </a:r>
             <a:r>
-              <a:rPr b="1" lang="en" sz="1800">
+              <a:rPr b="1" i="0" lang="en" sz="1800" u="none" cap="none" strike="noStrike">
                 <a:solidFill>
                   <a:srgbClr val="273239"/>
                 </a:solidFill>
@@ -11728,7 +11741,7 @@
               </a:rPr>
               <a:t>"Is the person’s income greater than $50,000?"</a:t>
             </a:r>
-            <a:endParaRPr b="1" sz="1800">
+            <a:endParaRPr b="1" i="0" sz="1800" u="none" cap="none" strike="noStrike">
               <a:solidFill>
                 <a:srgbClr val="273239"/>
               </a:solidFill>
@@ -11739,7 +11752,7 @@
             </a:endParaRPr>
           </a:p>
           <a:p>
-            <a:pPr indent="-342900" lvl="0" marL="685800" rtl="0" algn="l">
+            <a:pPr indent="-342900" lvl="0" marL="685800" marR="0" rtl="0" algn="l">
               <a:lnSpc>
                 <a:spcPct val="158000"/>
               </a:lnSpc>
@@ -11757,7 +11770,7 @@
               <a:buChar char="●"/>
             </a:pPr>
             <a:r>
-              <a:rPr lang="en" sz="1800">
+              <a:rPr b="0" i="0" lang="en" sz="1800" u="none" cap="none" strike="noStrike">
                 <a:solidFill>
                   <a:srgbClr val="273239"/>
                 </a:solidFill>
@@ -11768,7 +11781,7 @@
               </a:rPr>
               <a:t>If Yes, proceed to the next question.</a:t>
             </a:r>
-            <a:endParaRPr sz="1800">
+            <a:endParaRPr b="0" i="0" sz="1800" u="none" cap="none" strike="noStrike">
               <a:solidFill>
                 <a:srgbClr val="273239"/>
               </a:solidFill>
@@ -11779,7 +11792,7 @@
             </a:endParaRPr>
           </a:p>
           <a:p>
-            <a:pPr indent="-342900" lvl="0" marL="685800" rtl="0" algn="l">
+            <a:pPr indent="-342900" lvl="0" marL="685800" marR="0" rtl="0" algn="l">
               <a:lnSpc>
                 <a:spcPct val="158000"/>
               </a:lnSpc>
@@ -11797,7 +11810,7 @@
               <a:buChar char="●"/>
             </a:pPr>
             <a:r>
-              <a:rPr lang="en" sz="1800">
+              <a:rPr b="0" i="0" lang="en" sz="1800" u="none" cap="none" strike="noStrike">
                 <a:solidFill>
                   <a:srgbClr val="273239"/>
                 </a:solidFill>
@@ -11808,7 +11821,7 @@
               </a:rPr>
               <a:t>If No, predict "No Purchase" (leaf node).</a:t>
             </a:r>
-            <a:endParaRPr sz="1800">
+            <a:endParaRPr b="0" i="0" sz="1800" u="none" cap="none" strike="noStrike">
               <a:solidFill>
                 <a:srgbClr val="273239"/>
               </a:solidFill>
@@ -11819,7 +11832,7 @@
             </a:endParaRPr>
           </a:p>
           <a:p>
-            <a:pPr indent="0" lvl="0" marL="0" rtl="0" algn="l">
+            <a:pPr indent="0" lvl="0" marL="0" marR="0" rtl="0" algn="l">
               <a:lnSpc>
                 <a:spcPct val="120000"/>
               </a:lnSpc>
@@ -11829,10 +11842,15 @@
               <a:spcAft>
                 <a:spcPts val="0"/>
               </a:spcAft>
+              <a:buClr>
+                <a:srgbClr val="000000"/>
+              </a:buClr>
+              <a:buSzPts val="1800"/>
+              <a:buFont typeface="Arial"/>
               <a:buNone/>
             </a:pPr>
             <a:r>
-              <a:rPr b="1" lang="en" sz="1800">
+              <a:rPr b="1" i="0" lang="en" sz="1800" u="none" cap="none" strike="noStrike">
                 <a:solidFill>
                   <a:srgbClr val="273239"/>
                 </a:solidFill>
@@ -11844,7 +11862,7 @@
               <a:t>2. Internal Node (Age)</a:t>
             </a:r>
             <a:r>
-              <a:rPr lang="en" sz="1800">
+              <a:rPr b="0" i="0" lang="en" sz="1800" u="none" cap="none" strike="noStrike">
                 <a:solidFill>
                   <a:srgbClr val="273239"/>
                 </a:solidFill>
@@ -11855,7 +11873,7 @@
               </a:rPr>
               <a:t>:</a:t>
             </a:r>
-            <a:endParaRPr sz="1800">
+            <a:endParaRPr b="0" i="0" sz="1800" u="none" cap="none" strike="noStrike">
               <a:solidFill>
                 <a:srgbClr val="273239"/>
               </a:solidFill>
@@ -11866,7 +11884,7 @@
             </a:endParaRPr>
           </a:p>
           <a:p>
-            <a:pPr indent="0" lvl="0" marL="0" rtl="0" algn="l">
+            <a:pPr indent="0" lvl="0" marL="0" marR="0" rtl="0" algn="l">
               <a:lnSpc>
                 <a:spcPct val="120000"/>
               </a:lnSpc>
@@ -11876,10 +11894,15 @@
               <a:spcAft>
                 <a:spcPts val="800"/>
               </a:spcAft>
+              <a:buClr>
+                <a:srgbClr val="000000"/>
+              </a:buClr>
+              <a:buSzPts val="1800"/>
+              <a:buFont typeface="Arial"/>
               <a:buNone/>
             </a:pPr>
             <a:r>
-              <a:rPr b="1" lang="en" sz="1800">
+              <a:rPr b="1" i="0" lang="en" sz="1800" u="none" cap="none" strike="noStrike">
                 <a:solidFill>
                   <a:srgbClr val="273239"/>
                 </a:solidFill>
@@ -11891,7 +11914,7 @@
               <a:t>If the person’s income is greater than $50,000</a:t>
             </a:r>
             <a:r>
-              <a:rPr lang="en" sz="1800">
+              <a:rPr b="0" i="0" lang="en" sz="1800" u="none" cap="none" strike="noStrike">
                 <a:solidFill>
                   <a:srgbClr val="273239"/>
                 </a:solidFill>
@@ -11903,7 +11926,7 @@
               <a:t>, ask: </a:t>
             </a:r>
             <a:r>
-              <a:rPr b="1" lang="en" sz="1800">
+              <a:rPr b="1" i="0" lang="en" sz="1800" u="none" cap="none" strike="noStrike">
                 <a:solidFill>
                   <a:srgbClr val="273239"/>
                 </a:solidFill>
@@ -11914,7 +11937,7 @@
               </a:rPr>
               <a:t>"Is the person’s age above 30?"</a:t>
             </a:r>
-            <a:endParaRPr sz="1800">
+            <a:endParaRPr b="0" i="0" sz="1800" u="none" cap="none" strike="noStrike">
               <a:solidFill>
                 <a:srgbClr val="273239"/>
               </a:solidFill>
@@ -11953,7 +11976,7 @@
       </p:grpSpPr>
       <p:sp>
         <p:nvSpPr>
-          <p:cNvPr id="124" name="Google Shape;124;p23"/>
+          <p:cNvPr id="124" name="Google Shape;124;g3e04a08467b_0_22"/>
           <p:cNvSpPr txBox="1"/>
           <p:nvPr>
             <p:ph type="title"/>
@@ -12001,7 +12024,7 @@
       </p:sp>
       <p:sp>
         <p:nvSpPr>
-          <p:cNvPr id="125" name="Google Shape;125;p23"/>
+          <p:cNvPr id="125" name="Google Shape;125;g3e04a08467b_0_22"/>
           <p:cNvSpPr txBox="1"/>
           <p:nvPr/>
         </p:nvSpPr>
@@ -12024,7 +12047,7 @@
           </a:bodyPr>
           <a:lstStyle/>
           <a:p>
-            <a:pPr indent="-342900" lvl="0" marL="685800" rtl="0" algn="l">
+            <a:pPr indent="-342900" lvl="0" marL="685800" marR="0" rtl="0" algn="l">
               <a:lnSpc>
                 <a:spcPct val="158000"/>
               </a:lnSpc>
@@ -12042,7 +12065,7 @@
               <a:buChar char="●"/>
             </a:pPr>
             <a:r>
-              <a:rPr lang="en" sz="1800">
+              <a:rPr b="0" i="0" lang="en" sz="1800" u="none" cap="none" strike="noStrike">
                 <a:solidFill>
                   <a:srgbClr val="273239"/>
                 </a:solidFill>
@@ -12053,7 +12076,7 @@
               </a:rPr>
               <a:t>If Yes, proceed to the next question.</a:t>
             </a:r>
-            <a:endParaRPr sz="1800">
+            <a:endParaRPr b="0" i="0" sz="1800" u="none" cap="none" strike="noStrike">
               <a:solidFill>
                 <a:srgbClr val="273239"/>
               </a:solidFill>
@@ -12064,7 +12087,7 @@
             </a:endParaRPr>
           </a:p>
           <a:p>
-            <a:pPr indent="-342900" lvl="0" marL="685800" rtl="0" algn="l">
+            <a:pPr indent="-342900" lvl="0" marL="685800" marR="0" rtl="0" algn="l">
               <a:lnSpc>
                 <a:spcPct val="158000"/>
               </a:lnSpc>
@@ -12082,7 +12105,7 @@
               <a:buChar char="●"/>
             </a:pPr>
             <a:r>
-              <a:rPr lang="en" sz="1800">
+              <a:rPr b="0" i="0" lang="en" sz="1800" u="none" cap="none" strike="noStrike">
                 <a:solidFill>
                   <a:srgbClr val="273239"/>
                 </a:solidFill>
@@ -12093,7 +12116,7 @@
               </a:rPr>
               <a:t>If No, predict "No Purchase" (leaf node).</a:t>
             </a:r>
-            <a:endParaRPr sz="1800">
+            <a:endParaRPr b="0" i="0" sz="1800" u="none" cap="none" strike="noStrike">
               <a:solidFill>
                 <a:srgbClr val="273239"/>
               </a:solidFill>
@@ -12104,7 +12127,7 @@
             </a:endParaRPr>
           </a:p>
           <a:p>
-            <a:pPr indent="0" lvl="0" marL="0" rtl="0" algn="l">
+            <a:pPr indent="0" lvl="0" marL="0" marR="0" rtl="0" algn="l">
               <a:lnSpc>
                 <a:spcPct val="120000"/>
               </a:lnSpc>
@@ -12114,10 +12137,15 @@
               <a:spcAft>
                 <a:spcPts val="0"/>
               </a:spcAft>
+              <a:buClr>
+                <a:srgbClr val="000000"/>
+              </a:buClr>
+              <a:buSzPts val="1800"/>
+              <a:buFont typeface="Arial"/>
               <a:buNone/>
             </a:pPr>
             <a:r>
-              <a:rPr b="1" lang="en" sz="1800">
+              <a:rPr b="1" i="0" lang="en" sz="1800" u="none" cap="none" strike="noStrike">
                 <a:solidFill>
                   <a:srgbClr val="273239"/>
                 </a:solidFill>
@@ -12129,7 +12157,7 @@
               <a:t>3. Internal Node (Previous Purchases)</a:t>
             </a:r>
             <a:r>
-              <a:rPr lang="en" sz="1800">
+              <a:rPr b="0" i="0" lang="en" sz="1800" u="none" cap="none" strike="noStrike">
                 <a:solidFill>
                   <a:srgbClr val="273239"/>
                 </a:solidFill>
@@ -12140,7 +12168,7 @@
               </a:rPr>
               <a:t>:</a:t>
             </a:r>
-            <a:endParaRPr sz="1800">
+            <a:endParaRPr b="0" i="0" sz="1800" u="none" cap="none" strike="noStrike">
               <a:solidFill>
                 <a:srgbClr val="273239"/>
               </a:solidFill>
@@ -12151,7 +12179,7 @@
             </a:endParaRPr>
           </a:p>
           <a:p>
-            <a:pPr indent="-342900" lvl="0" marL="685800" rtl="0" algn="l">
+            <a:pPr indent="-342900" lvl="0" marL="685800" marR="0" rtl="0" algn="l">
               <a:lnSpc>
                 <a:spcPct val="158000"/>
               </a:lnSpc>
@@ -12169,7 +12197,7 @@
               <a:buChar char="●"/>
             </a:pPr>
             <a:r>
-              <a:rPr lang="en" sz="1800">
+              <a:rPr b="0" i="0" lang="en" sz="1800" u="none" cap="none" strike="noStrike">
                 <a:solidFill>
                   <a:srgbClr val="273239"/>
                 </a:solidFill>
@@ -12180,7 +12208,7 @@
               </a:rPr>
               <a:t>If the person is above 30 and has made previous purchases, predict "Purchase" (leaf node).</a:t>
             </a:r>
-            <a:endParaRPr sz="1800">
+            <a:endParaRPr b="0" i="0" sz="1800" u="none" cap="none" strike="noStrike">
               <a:solidFill>
                 <a:srgbClr val="273239"/>
               </a:solidFill>
@@ -12191,7 +12219,7 @@
             </a:endParaRPr>
           </a:p>
           <a:p>
-            <a:pPr indent="-342900" lvl="0" marL="685800" rtl="0" algn="l">
+            <a:pPr indent="-342900" lvl="0" marL="685800" marR="0" rtl="0" algn="l">
               <a:lnSpc>
                 <a:spcPct val="158000"/>
               </a:lnSpc>
@@ -12209,7 +12237,7 @@
               <a:buChar char="●"/>
             </a:pPr>
             <a:r>
-              <a:rPr lang="en" sz="1800">
+              <a:rPr b="0" i="0" lang="en" sz="1800" u="none" cap="none" strike="noStrike">
                 <a:solidFill>
                   <a:srgbClr val="273239"/>
                 </a:solidFill>
@@ -12220,7 +12248,7 @@
               </a:rPr>
               <a:t>If the person is above 30 and has not made previous purchases, predict "No Purchase" (leaf node)</a:t>
             </a:r>
-            <a:endParaRPr sz="1450">
+            <a:endParaRPr b="0" i="0" sz="1450" u="none" cap="none" strike="noStrike">
               <a:solidFill>
                 <a:srgbClr val="273239"/>
               </a:solidFill>
@@ -12259,7 +12287,7 @@
       </p:grpSpPr>
       <p:sp>
         <p:nvSpPr>
-          <p:cNvPr id="130" name="Google Shape;130;p24"/>
+          <p:cNvPr id="130" name="Google Shape;130;p7"/>
           <p:cNvSpPr txBox="1"/>
           <p:nvPr>
             <p:ph type="title"/>
@@ -12307,7 +12335,7 @@
       </p:sp>
       <p:sp>
         <p:nvSpPr>
-          <p:cNvPr id="131" name="Google Shape;131;p24"/>
+          <p:cNvPr id="131" name="Google Shape;131;p7"/>
           <p:cNvSpPr txBox="1"/>
           <p:nvPr/>
         </p:nvSpPr>
@@ -12330,7 +12358,7 @@
           </a:bodyPr>
           <a:lstStyle/>
           <a:p>
-            <a:pPr indent="0" lvl="0" marL="0" rtl="0" algn="l">
+            <a:pPr indent="0" lvl="0" marL="0" marR="0" rtl="0" algn="l">
               <a:lnSpc>
                 <a:spcPct val="115000"/>
               </a:lnSpc>
@@ -12340,28 +12368,73 @@
               <a:spcAft>
                 <a:spcPts val="0"/>
               </a:spcAft>
+              <a:buClr>
+                <a:srgbClr val="000000"/>
+              </a:buClr>
+              <a:buSzPts val="1800"/>
+              <a:buFont typeface="Arial"/>
               <a:buNone/>
             </a:pPr>
             <a:r>
-              <a:rPr b="1" lang="en" sz="1800"/>
+              <a:rPr b="1" i="0" lang="en" sz="1800" u="none" cap="none" strike="noStrike">
+                <a:solidFill>
+                  <a:srgbClr val="000000"/>
+                </a:solidFill>
+                <a:latin typeface="Arial"/>
+                <a:ea typeface="Arial"/>
+                <a:cs typeface="Arial"/>
+                <a:sym typeface="Arial"/>
+              </a:rPr>
               <a:t>Entropy</a:t>
             </a:r>
             <a:r>
-              <a:rPr lang="en" sz="1800"/>
+              <a:rPr b="0" i="0" lang="en" sz="1800" u="none" cap="none" strike="noStrike">
+                <a:solidFill>
+                  <a:srgbClr val="000000"/>
+                </a:solidFill>
+                <a:latin typeface="Arial"/>
+                <a:ea typeface="Arial"/>
+                <a:cs typeface="Arial"/>
+                <a:sym typeface="Arial"/>
+              </a:rPr>
               <a:t> is a measure of </a:t>
             </a:r>
             <a:r>
-              <a:rPr b="1" lang="en" sz="1800"/>
+              <a:rPr b="1" i="0" lang="en" sz="1800" u="none" cap="none" strike="noStrike">
+                <a:solidFill>
+                  <a:srgbClr val="000000"/>
+                </a:solidFill>
+                <a:latin typeface="Arial"/>
+                <a:ea typeface="Arial"/>
+                <a:cs typeface="Arial"/>
+                <a:sym typeface="Arial"/>
+              </a:rPr>
               <a:t>uncertainty or impurity</a:t>
             </a:r>
             <a:r>
-              <a:rPr lang="en" sz="1800"/>
+              <a:rPr b="0" i="0" lang="en" sz="1800" u="none" cap="none" strike="noStrike">
+                <a:solidFill>
+                  <a:srgbClr val="000000"/>
+                </a:solidFill>
+                <a:latin typeface="Arial"/>
+                <a:ea typeface="Arial"/>
+                <a:cs typeface="Arial"/>
+                <a:sym typeface="Arial"/>
+              </a:rPr>
               <a:t> in a dataset.</a:t>
             </a:r>
-            <a:endParaRPr sz="1800"/>
+            <a:endParaRPr b="0" i="0" sz="1800" u="none" cap="none" strike="noStrike">
+              <a:solidFill>
+                <a:srgbClr val="000000"/>
+              </a:solidFill>
+              <a:latin typeface="Arial"/>
+              <a:ea typeface="Arial"/>
+              <a:cs typeface="Arial"/>
+              <a:sym typeface="Arial"/>
+            </a:endParaRPr>
           </a:p>
           <a:p>
-            <a:pPr indent="-342900" lvl="0" marL="457200" rtl="0" algn="l">
+            <a:pPr indent="-342900" lvl="0" marL="457200" marR="0" rtl="0" algn="l">
               <a:lnSpc>
                 <a:spcPct val="115000"/>
               </a:lnSpc>
@@ -12371,17 +12444,37 @@
               <a:spcAft>
                 <a:spcPts val="0"/>
               </a:spcAft>
+              <a:buClr>
+                <a:srgbClr val="000000"/>
+              </a:buClr>
               <a:buSzPts val="1800"/>
+              <a:buFont typeface="Arial"/>
               <a:buChar char="●"/>
             </a:pPr>
             <a:r>
-              <a:rPr lang="en" sz="1800"/>
+              <a:rPr b="0" i="0" lang="en" sz="1800" u="none" cap="none" strike="noStrike">
+                <a:solidFill>
+                  <a:srgbClr val="000000"/>
+                </a:solidFill>
+                <a:latin typeface="Arial"/>
+                <a:ea typeface="Arial"/>
+                <a:cs typeface="Arial"/>
+                <a:sym typeface="Arial"/>
+              </a:rPr>
               <a:t>If all data belongs to one class → entropy = 0 (pure)</a:t>
             </a:r>
-            <a:endParaRPr sz="1800"/>
+            <a:endParaRPr b="0" i="0" sz="1800" u="none" cap="none" strike="noStrike">
+              <a:solidFill>
+                <a:srgbClr val="000000"/>
+              </a:solidFill>
+              <a:latin typeface="Arial"/>
+              <a:ea typeface="Arial"/>
+              <a:cs typeface="Arial"/>
+              <a:sym typeface="Arial"/>
+            </a:endParaRPr>
           </a:p>
           <a:p>
-            <a:pPr indent="-342900" lvl="0" marL="457200" rtl="0" algn="l">
+            <a:pPr indent="-342900" lvl="0" marL="457200" marR="0" rtl="0" algn="l">
               <a:lnSpc>
                 <a:spcPct val="115000"/>
               </a:lnSpc>
@@ -12391,14 +12484,34 @@
               <a:spcAft>
                 <a:spcPts val="0"/>
               </a:spcAft>
+              <a:buClr>
+                <a:srgbClr val="000000"/>
+              </a:buClr>
               <a:buSzPts val="1800"/>
+              <a:buFont typeface="Arial"/>
               <a:buChar char="●"/>
             </a:pPr>
             <a:r>
-              <a:rPr lang="en" sz="1800"/>
+              <a:rPr b="0" i="0" lang="en" sz="1800" u="none" cap="none" strike="noStrike">
+                <a:solidFill>
+                  <a:srgbClr val="000000"/>
+                </a:solidFill>
+                <a:latin typeface="Arial"/>
+                <a:ea typeface="Arial"/>
+                <a:cs typeface="Arial"/>
+                <a:sym typeface="Arial"/>
+              </a:rPr>
               <a:t>If data is evenly mixed → entropy is high (maximum uncertainty)</a:t>
             </a:r>
-            <a:endParaRPr sz="1800"/>
+            <a:endParaRPr b="0" i="0" sz="1800" u="none" cap="none" strike="noStrike">
+              <a:solidFill>
+                <a:srgbClr val="000000"/>
+              </a:solidFill>
+              <a:latin typeface="Arial"/>
+              <a:ea typeface="Arial"/>
+              <a:cs typeface="Arial"/>
+              <a:sym typeface="Arial"/>
+            </a:endParaRPr>
           </a:p>
           <a:p>
             <a:pPr indent="0" lvl="0" marL="0" marR="0" rtl="0" algn="just">
@@ -12421,7 +12534,7 @@
             <a:r>
               <a:t/>
             </a:r>
-            <a:endParaRPr b="1">
+            <a:endParaRPr b="1" i="0" sz="1400" u="none" cap="none" strike="noStrike">
               <a:solidFill>
                 <a:srgbClr val="0A0A0A"/>
               </a:solidFill>
@@ -12472,17 +12585,16 @@
       </p:sp>
       <p:pic>
         <p:nvPicPr>
-          <p:cNvPr id="132" name="Google Shape;132;p24"/>
+          <p:cNvPr id="132" name="Google Shape;132;p7"/>
           <p:cNvPicPr preferRelativeResize="0"/>
           <p:nvPr/>
         </p:nvPicPr>
-        <p:blipFill>
+        <p:blipFill rotWithShape="1">
           <a:blip r:embed="rId3">
             <a:alphaModFix/>
           </a:blip>
-          <a:stretch>
-            <a:fillRect/>
-          </a:stretch>
+          <a:srcRect b="0" l="0" r="0" t="0"/>
+          <a:stretch/>
         </p:blipFill>
         <p:spPr>
           <a:xfrm>
@@ -12525,7 +12637,7 @@
       </p:grpSpPr>
       <p:sp>
         <p:nvSpPr>
-          <p:cNvPr id="137" name="Google Shape;137;p25"/>
+          <p:cNvPr id="137" name="Google Shape;137;p8"/>
           <p:cNvSpPr txBox="1"/>
           <p:nvPr>
             <p:ph type="title"/>
@@ -12573,17 +12685,16 @@
       </p:sp>
       <p:pic>
         <p:nvPicPr>
-          <p:cNvPr id="138" name="Google Shape;138;p25"/>
+          <p:cNvPr id="138" name="Google Shape;138;p8"/>
           <p:cNvPicPr preferRelativeResize="0"/>
           <p:nvPr/>
         </p:nvPicPr>
-        <p:blipFill>
+        <p:blipFill rotWithShape="1">
           <a:blip r:embed="rId3">
             <a:alphaModFix/>
           </a:blip>
-          <a:stretch>
-            <a:fillRect/>
-          </a:stretch>
+          <a:srcRect b="0" l="0" r="0" t="0"/>
+          <a:stretch/>
         </p:blipFill>
         <p:spPr>
           <a:xfrm>
@@ -12626,7 +12737,7 @@
       </p:grpSpPr>
       <p:sp>
         <p:nvSpPr>
-          <p:cNvPr id="143" name="Google Shape;143;p26"/>
+          <p:cNvPr id="143" name="Google Shape;143;p9"/>
           <p:cNvSpPr txBox="1"/>
           <p:nvPr>
             <p:ph type="title"/>
@@ -12684,7 +12795,7 @@
       </p:sp>
       <p:sp>
         <p:nvSpPr>
-          <p:cNvPr id="144" name="Google Shape;144;p26"/>
+          <p:cNvPr id="144" name="Google Shape;144;p9"/>
           <p:cNvSpPr txBox="1"/>
           <p:nvPr/>
         </p:nvSpPr>
@@ -12753,7 +12864,7 @@
             </a:endParaRPr>
           </a:p>
           <a:p>
-            <a:pPr indent="0" lvl="0" marL="0" rtl="0" algn="l">
+            <a:pPr indent="0" lvl="0" marL="0" marR="0" rtl="0" algn="l">
               <a:lnSpc>
                 <a:spcPct val="135714"/>
               </a:lnSpc>
@@ -12763,10 +12874,15 @@
               <a:spcAft>
                 <a:spcPts val="0"/>
               </a:spcAft>
+              <a:buClr>
+                <a:srgbClr val="000000"/>
+              </a:buClr>
+              <a:buSzPts val="1650"/>
+              <a:buFont typeface="Arial"/>
               <a:buNone/>
             </a:pPr>
             <a:r>
-              <a:rPr b="1" lang="en" sz="1650">
+              <a:rPr b="1" i="0" lang="en" sz="1650" u="none" cap="none" strike="noStrike">
                 <a:solidFill>
                   <a:srgbClr val="0A0A0A"/>
                 </a:solidFill>
@@ -12780,7 +12896,7 @@
               </a:rPr>
               <a:t>from sklearn.tree import DecisionTreeClassifier</a:t>
             </a:r>
-            <a:endParaRPr b="1" sz="2000">
+            <a:endParaRPr b="1" i="0" sz="2000" u="none" cap="none" strike="noStrike">
               <a:solidFill>
                 <a:srgbClr val="0A0A0A"/>
               </a:solidFill>
@@ -13113,7 +13229,7 @@
       </p:grpSpPr>
       <p:sp>
         <p:nvSpPr>
-          <p:cNvPr id="149" name="Google Shape;149;p27"/>
+          <p:cNvPr id="149" name="Google Shape;149;p10"/>
           <p:cNvSpPr txBox="1"/>
           <p:nvPr>
             <p:ph type="title"/>
@@ -13158,7 +13274,7 @@
                 <a:cs typeface="Times New Roman"/>
                 <a:sym typeface="Times New Roman"/>
               </a:rPr>
-              <a:t>Implementing KNN</a:t>
+              <a:t>Implementing Decision Tree</a:t>
             </a:r>
             <a:endParaRPr>
               <a:latin typeface="Times New Roman"/>
@@ -13171,7 +13287,7 @@
       </p:sp>
       <p:sp>
         <p:nvSpPr>
-          <p:cNvPr id="150" name="Google Shape;150;p27"/>
+          <p:cNvPr id="150" name="Google Shape;150;p10"/>
           <p:cNvSpPr txBox="1"/>
           <p:nvPr/>
         </p:nvSpPr>
@@ -13273,7 +13389,7 @@
               <a:t>	</a:t>
             </a:r>
             <a:r>
-              <a:rPr lang="en" sz="1800">
+              <a:rPr b="0" i="0" lang="en" sz="1800" u="none" cap="none" strike="noStrike">
                 <a:solidFill>
                   <a:srgbClr val="0A0A0A"/>
                 </a:solidFill>
@@ -13285,84 +13401,9 @@
                 <a:cs typeface="Times New Roman"/>
                 <a:sym typeface="Times New Roman"/>
               </a:rPr>
-              <a:t>DT</a:t>
+              <a:t>DT= DecisionTreeClassifier(criterion='entropy',max_depth=3,random_state=10)</a:t>
             </a:r>
-            <a:r>
-              <a:rPr i="0" lang="en" sz="1800" u="none" cap="none" strike="noStrike">
-                <a:solidFill>
-                  <a:srgbClr val="0A0A0A"/>
-                </a:solidFill>
-                <a:highlight>
-                  <a:srgbClr val="FFFFFF"/>
-                </a:highlight>
-                <a:latin typeface="Times New Roman"/>
-                <a:ea typeface="Times New Roman"/>
-                <a:cs typeface="Times New Roman"/>
-                <a:sym typeface="Times New Roman"/>
-              </a:rPr>
-              <a:t>= </a:t>
-            </a:r>
-            <a:r>
-              <a:rPr lang="en" sz="1800">
-                <a:solidFill>
-                  <a:srgbClr val="0A0A0A"/>
-                </a:solidFill>
-                <a:highlight>
-                  <a:srgbClr val="FFFFFF"/>
-                </a:highlight>
-                <a:latin typeface="Times New Roman"/>
-                <a:ea typeface="Times New Roman"/>
-                <a:cs typeface="Times New Roman"/>
-                <a:sym typeface="Times New Roman"/>
-              </a:rPr>
-              <a:t>DecisionTreeClassifier</a:t>
-            </a:r>
-            <a:r>
-              <a:rPr i="0" lang="en" sz="1800" u="none" cap="none" strike="noStrike">
-                <a:solidFill>
-                  <a:srgbClr val="0A0A0A"/>
-                </a:solidFill>
-                <a:highlight>
-                  <a:srgbClr val="FFFFFF"/>
-                </a:highlight>
-                <a:latin typeface="Times New Roman"/>
-                <a:ea typeface="Times New Roman"/>
-                <a:cs typeface="Times New Roman"/>
-                <a:sym typeface="Times New Roman"/>
-              </a:rPr>
-              <a:t>(</a:t>
-            </a:r>
-            <a:r>
-              <a:rPr lang="en" sz="1800">
-                <a:solidFill>
-                  <a:srgbClr val="0A0A0A"/>
-                </a:solidFill>
-                <a:highlight>
-                  <a:srgbClr val="FFFFFF"/>
-                </a:highlight>
-                <a:latin typeface="Times New Roman"/>
-                <a:ea typeface="Times New Roman"/>
-                <a:cs typeface="Times New Roman"/>
-                <a:sym typeface="Times New Roman"/>
-              </a:rPr>
-              <a:t>criterion='entropy',max_depth=3,random_state=10</a:t>
-            </a:r>
-            <a:r>
-              <a:rPr i="0" lang="en" sz="1800" u="none" cap="none" strike="noStrike">
-                <a:solidFill>
-                  <a:srgbClr val="0A0A0A"/>
-                </a:solidFill>
-                <a:highlight>
-                  <a:srgbClr val="FFFFFF"/>
-                </a:highlight>
-                <a:latin typeface="Times New Roman"/>
-                <a:ea typeface="Times New Roman"/>
-                <a:cs typeface="Times New Roman"/>
-                <a:sym typeface="Times New Roman"/>
-              </a:rPr>
-              <a:t>)</a:t>
-            </a:r>
-            <a:endParaRPr i="0" sz="1800" u="none" cap="none" strike="noStrike">
+            <a:endParaRPr b="0" i="0" sz="1800" u="none" cap="none" strike="noStrike">
               <a:solidFill>
                 <a:srgbClr val="0A0A0A"/>
               </a:solidFill>
@@ -13394,7 +13435,7 @@
               <a:buNone/>
             </a:pPr>
             <a:r>
-              <a:rPr lang="en" sz="1800">
+              <a:rPr b="0" i="0" lang="en" sz="1800" u="none" cap="none" strike="noStrike">
                 <a:solidFill>
                   <a:srgbClr val="0A0A0A"/>
                 </a:solidFill>
@@ -13513,37 +13554,7 @@
                 <a:cs typeface="Times New Roman"/>
                 <a:sym typeface="Times New Roman"/>
               </a:rPr>
-              <a:t>y_pred = </a:t>
-            </a:r>
-            <a:r>
-              <a:rPr lang="en" sz="1900">
-                <a:solidFill>
-                  <a:srgbClr val="0A0A0A"/>
-                </a:solidFill>
-                <a:highlight>
-                  <a:schemeClr val="lt1"/>
-                </a:highlight>
-                <a:latin typeface="Times New Roman"/>
-                <a:ea typeface="Times New Roman"/>
-                <a:cs typeface="Times New Roman"/>
-                <a:sym typeface="Times New Roman"/>
-              </a:rPr>
-              <a:t>DT</a:t>
-            </a:r>
-            <a:r>
-              <a:rPr b="0" i="0" lang="en" sz="1900" u="none" cap="none" strike="noStrike">
-                <a:solidFill>
-                  <a:srgbClr val="0A0A0A"/>
-                </a:solidFill>
-                <a:highlight>
-                  <a:schemeClr val="lt1"/>
-                </a:highlight>
-                <a:latin typeface="Times New Roman"/>
-                <a:ea typeface="Times New Roman"/>
-                <a:cs typeface="Times New Roman"/>
-                <a:sym typeface="Times New Roman"/>
-              </a:rPr>
-              <a:t>.predict(x_test)</a:t>
+              <a:t>y_pred = DT.predict(x_test)</a:t>
             </a:r>
             <a:endParaRPr b="0" i="0" sz="1900" u="none" cap="none" strike="noStrike">
               <a:solidFill>
@@ -13655,7 +13666,7 @@
       </p:grpSpPr>
       <p:sp>
         <p:nvSpPr>
-          <p:cNvPr id="70" name="Google Shape;70;p14"/>
+          <p:cNvPr id="70" name="Google Shape;70;g3d8b34d5aa0_0_0"/>
           <p:cNvSpPr txBox="1"/>
           <p:nvPr>
             <p:ph type="title"/>
@@ -13681,6 +13692,9 @@
           <a:lstStyle/>
           <a:p>
             <a:pPr indent="0" lvl="0" marL="0" rtl="0" algn="l">
+              <a:lnSpc>
+                <a:spcPct val="100000"/>
+              </a:lnSpc>
               <a:spcBef>
                 <a:spcPts val="0"/>
               </a:spcBef>
@@ -13700,7 +13714,7 @@
       </p:sp>
       <p:sp>
         <p:nvSpPr>
-          <p:cNvPr id="71" name="Google Shape;71;p14"/>
+          <p:cNvPr id="71" name="Google Shape;71;g3d8b34d5aa0_0_0"/>
           <p:cNvSpPr txBox="1"/>
           <p:nvPr/>
         </p:nvSpPr>
@@ -13723,7 +13737,7 @@
           </a:bodyPr>
           <a:lstStyle/>
           <a:p>
-            <a:pPr indent="0" lvl="0" marL="0" rtl="0" algn="l">
+            <a:pPr indent="0" lvl="0" marL="0" marR="0" rtl="0" algn="l">
               <a:lnSpc>
                 <a:spcPct val="120000"/>
               </a:lnSpc>
@@ -13733,38 +13747,43 @@
               <a:spcAft>
                 <a:spcPts val="0"/>
               </a:spcAft>
+              <a:buClr>
+                <a:srgbClr val="000000"/>
+              </a:buClr>
+              <a:buSzPts val="1800"/>
+              <a:buFont typeface="Arial"/>
               <a:buNone/>
             </a:pPr>
             <a:r>
-              <a:rPr lang="en" sz="1800">
-                <a:solidFill>
-                  <a:srgbClr val="273239"/>
+              <a:rPr b="0" i="0" lang="en" sz="1800" u="none" cap="none" strike="noStrike">
+                <a:solidFill>
+                  <a:srgbClr val="0A0A0A"/>
                 </a:solidFill>
                 <a:highlight>
                   <a:srgbClr val="FFFFFF"/>
                 </a:highlight>
-                <a:latin typeface="Nunito"/>
-                <a:ea typeface="Nunito"/>
-                <a:cs typeface="Nunito"/>
-                <a:sym typeface="Nunito"/>
+                <a:latin typeface="Times New Roman"/>
+                <a:ea typeface="Times New Roman"/>
+                <a:cs typeface="Times New Roman"/>
+                <a:sym typeface="Times New Roman"/>
               </a:rPr>
               <a:t>A decision tree is a supervised learning algorithm used for both classification and regression tasks. </a:t>
             </a:r>
-            <a:endParaRPr sz="1800">
+            <a:endParaRPr b="0" i="0" sz="1800" u="none" cap="none" strike="noStrike">
               <a:solidFill>
-                <a:srgbClr val="273239"/>
+                <a:srgbClr val="0A0A0A"/>
               </a:solidFill>
               <a:highlight>
                 <a:srgbClr val="FFFFFF"/>
               </a:highlight>
-              <a:latin typeface="Nunito"/>
-              <a:ea typeface="Nunito"/>
-              <a:cs typeface="Nunito"/>
-              <a:sym typeface="Nunito"/>
+              <a:latin typeface="Times New Roman"/>
+              <a:ea typeface="Times New Roman"/>
+              <a:cs typeface="Times New Roman"/>
+              <a:sym typeface="Times New Roman"/>
             </a:endParaRPr>
           </a:p>
           <a:p>
-            <a:pPr indent="0" lvl="0" marL="0" rtl="0" algn="l">
+            <a:pPr indent="0" lvl="0" marL="0" marR="0" rtl="0" algn="l">
               <a:lnSpc>
                 <a:spcPct val="120000"/>
               </a:lnSpc>
@@ -13774,38 +13793,43 @@
               <a:spcAft>
                 <a:spcPts val="0"/>
               </a:spcAft>
+              <a:buClr>
+                <a:srgbClr val="000000"/>
+              </a:buClr>
+              <a:buSzPts val="1800"/>
+              <a:buFont typeface="Arial"/>
               <a:buNone/>
             </a:pPr>
             <a:r>
-              <a:rPr lang="en" sz="1800">
-                <a:solidFill>
-                  <a:srgbClr val="273239"/>
+              <a:rPr b="0" i="0" lang="en" sz="1800" u="none" cap="none" strike="noStrike">
+                <a:solidFill>
+                  <a:srgbClr val="0A0A0A"/>
                 </a:solidFill>
                 <a:highlight>
                   <a:srgbClr val="FFFFFF"/>
                 </a:highlight>
-                <a:latin typeface="Nunito"/>
-                <a:ea typeface="Nunito"/>
-                <a:cs typeface="Nunito"/>
-                <a:sym typeface="Nunito"/>
+                <a:latin typeface="Times New Roman"/>
+                <a:ea typeface="Times New Roman"/>
+                <a:cs typeface="Times New Roman"/>
+                <a:sym typeface="Times New Roman"/>
               </a:rPr>
               <a:t>It has a hierarchical tree structure which consists of a root node, branches, internal nodes and leaf nodes. </a:t>
             </a:r>
-            <a:endParaRPr sz="1800">
+            <a:endParaRPr b="0" i="0" sz="1800" u="none" cap="none" strike="noStrike">
               <a:solidFill>
-                <a:srgbClr val="273239"/>
+                <a:srgbClr val="0A0A0A"/>
               </a:solidFill>
               <a:highlight>
                 <a:srgbClr val="FFFFFF"/>
               </a:highlight>
-              <a:latin typeface="Nunito"/>
-              <a:ea typeface="Nunito"/>
-              <a:cs typeface="Nunito"/>
-              <a:sym typeface="Nunito"/>
+              <a:latin typeface="Times New Roman"/>
+              <a:ea typeface="Times New Roman"/>
+              <a:cs typeface="Times New Roman"/>
+              <a:sym typeface="Times New Roman"/>
             </a:endParaRPr>
           </a:p>
           <a:p>
-            <a:pPr indent="0" lvl="0" marL="0" rtl="0" algn="l">
+            <a:pPr indent="0" lvl="0" marL="0" marR="0" rtl="0" algn="l">
               <a:lnSpc>
                 <a:spcPct val="120000"/>
               </a:lnSpc>
@@ -13815,38 +13839,43 @@
               <a:spcAft>
                 <a:spcPts val="0"/>
               </a:spcAft>
+              <a:buClr>
+                <a:srgbClr val="000000"/>
+              </a:buClr>
+              <a:buSzPts val="1800"/>
+              <a:buFont typeface="Arial"/>
               <a:buNone/>
             </a:pPr>
             <a:r>
-              <a:rPr lang="en" sz="1800">
-                <a:solidFill>
-                  <a:srgbClr val="273239"/>
+              <a:rPr b="0" i="0" lang="en" sz="1800" u="none" cap="none" strike="noStrike">
+                <a:solidFill>
+                  <a:srgbClr val="0A0A0A"/>
                 </a:solidFill>
                 <a:highlight>
                   <a:srgbClr val="FFFFFF"/>
                 </a:highlight>
-                <a:latin typeface="Nunito"/>
-                <a:ea typeface="Nunito"/>
-                <a:cs typeface="Nunito"/>
-                <a:sym typeface="Nunito"/>
+                <a:latin typeface="Times New Roman"/>
+                <a:ea typeface="Times New Roman"/>
+                <a:cs typeface="Times New Roman"/>
+                <a:sym typeface="Times New Roman"/>
               </a:rPr>
               <a:t>It works like a flowchart that helps in making step-by-step decisions, where:</a:t>
             </a:r>
-            <a:endParaRPr sz="1800">
+            <a:endParaRPr b="0" i="0" sz="1800" u="none" cap="none" strike="noStrike">
               <a:solidFill>
-                <a:srgbClr val="273239"/>
+                <a:srgbClr val="0A0A0A"/>
               </a:solidFill>
               <a:highlight>
                 <a:srgbClr val="FFFFFF"/>
               </a:highlight>
-              <a:latin typeface="Nunito"/>
-              <a:ea typeface="Nunito"/>
-              <a:cs typeface="Nunito"/>
-              <a:sym typeface="Nunito"/>
+              <a:latin typeface="Times New Roman"/>
+              <a:ea typeface="Times New Roman"/>
+              <a:cs typeface="Times New Roman"/>
+              <a:sym typeface="Times New Roman"/>
             </a:endParaRPr>
           </a:p>
           <a:p>
-            <a:pPr indent="-342900" lvl="0" marL="685800" rtl="0" algn="l">
+            <a:pPr indent="-342900" lvl="0" marL="685800" marR="0" rtl="0" algn="l">
               <a:lnSpc>
                 <a:spcPct val="158000"/>
               </a:lnSpc>
@@ -13857,42 +13886,42 @@
                 <a:spcPts val="0"/>
               </a:spcAft>
               <a:buClr>
-                <a:srgbClr val="273239"/>
+                <a:srgbClr val="0A0A0A"/>
               </a:buClr>
               <a:buSzPts val="1800"/>
-              <a:buFont typeface="Nunito"/>
+              <a:buFont typeface="Times New Roman"/>
               <a:buChar char="●"/>
             </a:pPr>
             <a:r>
-              <a:rPr lang="en" sz="1800">
-                <a:solidFill>
-                  <a:srgbClr val="273239"/>
+              <a:rPr b="0" i="0" lang="en" sz="1800" u="none" cap="none" strike="noStrike">
+                <a:solidFill>
+                  <a:srgbClr val="0A0A0A"/>
                 </a:solidFill>
                 <a:highlight>
                   <a:srgbClr val="FFFFFF"/>
                 </a:highlight>
-                <a:latin typeface="Nunito"/>
-                <a:ea typeface="Nunito"/>
-                <a:cs typeface="Nunito"/>
-                <a:sym typeface="Nunito"/>
+                <a:latin typeface="Times New Roman"/>
+                <a:ea typeface="Times New Roman"/>
+                <a:cs typeface="Times New Roman"/>
+                <a:sym typeface="Times New Roman"/>
               </a:rPr>
               <a:t>Internal nodes represent attribute tests</a:t>
             </a:r>
-            <a:endParaRPr sz="1800">
+            <a:endParaRPr b="0" i="0" sz="1800" u="none" cap="none" strike="noStrike">
               <a:solidFill>
-                <a:srgbClr val="273239"/>
+                <a:srgbClr val="0A0A0A"/>
               </a:solidFill>
               <a:highlight>
                 <a:srgbClr val="FFFFFF"/>
               </a:highlight>
-              <a:latin typeface="Nunito"/>
-              <a:ea typeface="Nunito"/>
-              <a:cs typeface="Nunito"/>
-              <a:sym typeface="Nunito"/>
+              <a:latin typeface="Times New Roman"/>
+              <a:ea typeface="Times New Roman"/>
+              <a:cs typeface="Times New Roman"/>
+              <a:sym typeface="Times New Roman"/>
             </a:endParaRPr>
           </a:p>
           <a:p>
-            <a:pPr indent="-342900" lvl="0" marL="685800" rtl="0" algn="l">
+            <a:pPr indent="-342900" lvl="0" marL="685800" marR="0" rtl="0" algn="l">
               <a:lnSpc>
                 <a:spcPct val="158000"/>
               </a:lnSpc>
@@ -13903,42 +13932,42 @@
                 <a:spcPts val="0"/>
               </a:spcAft>
               <a:buClr>
-                <a:srgbClr val="273239"/>
+                <a:srgbClr val="0A0A0A"/>
               </a:buClr>
               <a:buSzPts val="1800"/>
-              <a:buFont typeface="Nunito"/>
+              <a:buFont typeface="Times New Roman"/>
               <a:buChar char="●"/>
             </a:pPr>
             <a:r>
-              <a:rPr lang="en" sz="1800">
-                <a:solidFill>
-                  <a:srgbClr val="273239"/>
+              <a:rPr b="0" i="0" lang="en" sz="1800" u="none" cap="none" strike="noStrike">
+                <a:solidFill>
+                  <a:srgbClr val="0A0A0A"/>
                 </a:solidFill>
                 <a:highlight>
                   <a:srgbClr val="FFFFFF"/>
                 </a:highlight>
-                <a:latin typeface="Nunito"/>
-                <a:ea typeface="Nunito"/>
-                <a:cs typeface="Nunito"/>
-                <a:sym typeface="Nunito"/>
+                <a:latin typeface="Times New Roman"/>
+                <a:ea typeface="Times New Roman"/>
+                <a:cs typeface="Times New Roman"/>
+                <a:sym typeface="Times New Roman"/>
               </a:rPr>
               <a:t>Branches represent attribute values</a:t>
             </a:r>
-            <a:endParaRPr sz="1800">
+            <a:endParaRPr b="0" i="0" sz="1800" u="none" cap="none" strike="noStrike">
               <a:solidFill>
-                <a:srgbClr val="273239"/>
+                <a:srgbClr val="0A0A0A"/>
               </a:solidFill>
               <a:highlight>
                 <a:srgbClr val="FFFFFF"/>
               </a:highlight>
-              <a:latin typeface="Nunito"/>
-              <a:ea typeface="Nunito"/>
-              <a:cs typeface="Nunito"/>
-              <a:sym typeface="Nunito"/>
+              <a:latin typeface="Times New Roman"/>
+              <a:ea typeface="Times New Roman"/>
+              <a:cs typeface="Times New Roman"/>
+              <a:sym typeface="Times New Roman"/>
             </a:endParaRPr>
           </a:p>
           <a:p>
-            <a:pPr indent="-342900" lvl="0" marL="685800" rtl="0" algn="l">
+            <a:pPr indent="-342900" lvl="0" marL="685800" marR="0" rtl="0" algn="l">
               <a:lnSpc>
                 <a:spcPct val="158000"/>
               </a:lnSpc>
@@ -13949,38 +13978,38 @@
                 <a:spcPts val="0"/>
               </a:spcAft>
               <a:buClr>
-                <a:srgbClr val="273239"/>
+                <a:srgbClr val="0A0A0A"/>
               </a:buClr>
               <a:buSzPts val="1800"/>
-              <a:buFont typeface="Nunito"/>
+              <a:buFont typeface="Times New Roman"/>
               <a:buChar char="●"/>
             </a:pPr>
             <a:r>
-              <a:rPr lang="en" sz="1800">
-                <a:solidFill>
-                  <a:srgbClr val="273239"/>
+              <a:rPr b="0" i="0" lang="en" sz="1800" u="none" cap="none" strike="noStrike">
+                <a:solidFill>
+                  <a:srgbClr val="0A0A0A"/>
                 </a:solidFill>
                 <a:highlight>
                   <a:srgbClr val="FFFFFF"/>
                 </a:highlight>
-                <a:latin typeface="Nunito"/>
-                <a:ea typeface="Nunito"/>
-                <a:cs typeface="Nunito"/>
-                <a:sym typeface="Nunito"/>
+                <a:latin typeface="Times New Roman"/>
+                <a:ea typeface="Times New Roman"/>
+                <a:cs typeface="Times New Roman"/>
+                <a:sym typeface="Times New Roman"/>
               </a:rPr>
               <a:t>Leaf nodes represent final decisions or predictions.</a:t>
             </a:r>
-            <a:endParaRPr sz="1800">
+            <a:endParaRPr b="0" i="0" sz="1800" u="none" cap="none" strike="noStrike">
               <a:solidFill>
-                <a:srgbClr val="273239"/>
+                <a:srgbClr val="0A0A0A"/>
               </a:solidFill>
               <a:highlight>
                 <a:srgbClr val="FFFFFF"/>
               </a:highlight>
-              <a:latin typeface="Nunito"/>
-              <a:ea typeface="Nunito"/>
-              <a:cs typeface="Nunito"/>
-              <a:sym typeface="Nunito"/>
+              <a:latin typeface="Times New Roman"/>
+              <a:ea typeface="Times New Roman"/>
+              <a:cs typeface="Times New Roman"/>
+              <a:sym typeface="Times New Roman"/>
             </a:endParaRPr>
           </a:p>
           <a:p>
@@ -14004,7 +14033,7 @@
             <a:r>
               <a:t/>
             </a:r>
-            <a:endParaRPr sz="1800">
+            <a:endParaRPr b="0" i="0" sz="1800" u="none" cap="none" strike="noStrike">
               <a:solidFill>
                 <a:srgbClr val="0A0A0A"/>
               </a:solidFill>
@@ -14046,7 +14075,7 @@
       </p:grpSpPr>
       <p:sp>
         <p:nvSpPr>
-          <p:cNvPr id="76" name="Google Shape;76;p15"/>
+          <p:cNvPr id="76" name="Google Shape;76;p2"/>
           <p:cNvSpPr txBox="1"/>
           <p:nvPr>
             <p:ph type="title"/>
@@ -14094,7 +14123,7 @@
       </p:sp>
       <p:sp>
         <p:nvSpPr>
-          <p:cNvPr id="77" name="Google Shape;77;p15"/>
+          <p:cNvPr id="77" name="Google Shape;77;p2"/>
           <p:cNvSpPr txBox="1"/>
           <p:nvPr/>
         </p:nvSpPr>
@@ -14117,7 +14146,7 @@
           </a:bodyPr>
           <a:lstStyle/>
           <a:p>
-            <a:pPr indent="0" lvl="0" marL="0" rtl="0" algn="l">
+            <a:pPr indent="0" lvl="0" marL="0" marR="0" rtl="0" algn="l">
               <a:lnSpc>
                 <a:spcPct val="115000"/>
               </a:lnSpc>
@@ -14127,16 +14156,37 @@
               <a:spcAft>
                 <a:spcPts val="0"/>
               </a:spcAft>
+              <a:buClr>
+                <a:srgbClr val="000000"/>
+              </a:buClr>
+              <a:buSzPts val="1800"/>
+              <a:buFont typeface="Arial"/>
               <a:buNone/>
             </a:pPr>
             <a:r>
-              <a:rPr lang="en" sz="1800"/>
+              <a:rPr b="0" i="0" lang="en" sz="1800" u="none" cap="none" strike="noStrike">
+                <a:solidFill>
+                  <a:srgbClr val="000000"/>
+                </a:solidFill>
+                <a:latin typeface="Times New Roman"/>
+                <a:ea typeface="Times New Roman"/>
+                <a:cs typeface="Times New Roman"/>
+                <a:sym typeface="Times New Roman"/>
+              </a:rPr>
               <a:t>A decision tree splits data into smaller groups by asking a series of questions. Each question is based on a feature of the data.</a:t>
             </a:r>
-            <a:endParaRPr sz="1800"/>
+            <a:endParaRPr b="0" i="0" sz="1800" u="none" cap="none" strike="noStrike">
+              <a:solidFill>
+                <a:srgbClr val="000000"/>
+              </a:solidFill>
+              <a:latin typeface="Times New Roman"/>
+              <a:ea typeface="Times New Roman"/>
+              <a:cs typeface="Times New Roman"/>
+              <a:sym typeface="Times New Roman"/>
+            </a:endParaRPr>
           </a:p>
           <a:p>
-            <a:pPr indent="0" lvl="0" marL="0" rtl="0" algn="l">
+            <a:pPr indent="0" lvl="0" marL="0" marR="0" rtl="0" algn="l">
               <a:lnSpc>
                 <a:spcPct val="115000"/>
               </a:lnSpc>
@@ -14146,16 +14196,37 @@
               <a:spcAft>
                 <a:spcPts val="0"/>
               </a:spcAft>
+              <a:buClr>
+                <a:srgbClr val="000000"/>
+              </a:buClr>
+              <a:buSzPts val="1800"/>
+              <a:buFont typeface="Arial"/>
               <a:buNone/>
             </a:pPr>
             <a:r>
-              <a:rPr lang="en" sz="1800"/>
+              <a:rPr b="0" i="0" lang="en" sz="1800" u="none" cap="none" strike="noStrike">
+                <a:solidFill>
+                  <a:srgbClr val="000000"/>
+                </a:solidFill>
+                <a:latin typeface="Times New Roman"/>
+                <a:ea typeface="Times New Roman"/>
+                <a:cs typeface="Times New Roman"/>
+                <a:sym typeface="Times New Roman"/>
+              </a:rPr>
               <a:t>Think of it like a game of “20 questions”:</a:t>
             </a:r>
-            <a:endParaRPr sz="1800"/>
+            <a:endParaRPr b="0" i="0" sz="1800" u="none" cap="none" strike="noStrike">
+              <a:solidFill>
+                <a:srgbClr val="000000"/>
+              </a:solidFill>
+              <a:latin typeface="Times New Roman"/>
+              <a:ea typeface="Times New Roman"/>
+              <a:cs typeface="Times New Roman"/>
+              <a:sym typeface="Times New Roman"/>
+            </a:endParaRPr>
           </a:p>
           <a:p>
-            <a:pPr indent="-342900" lvl="0" marL="457200" rtl="0" algn="l">
+            <a:pPr indent="-342900" lvl="0" marL="457200" marR="0" rtl="0" algn="l">
               <a:lnSpc>
                 <a:spcPct val="115000"/>
               </a:lnSpc>
@@ -14165,17 +14236,37 @@
               <a:spcAft>
                 <a:spcPts val="0"/>
               </a:spcAft>
+              <a:buClr>
+                <a:srgbClr val="000000"/>
+              </a:buClr>
               <a:buSzPts val="1800"/>
+              <a:buFont typeface="Times New Roman"/>
               <a:buChar char="●"/>
             </a:pPr>
             <a:r>
-              <a:rPr lang="en" sz="1800"/>
+              <a:rPr b="0" i="0" lang="en" sz="1800" u="none" cap="none" strike="noStrike">
+                <a:solidFill>
+                  <a:srgbClr val="000000"/>
+                </a:solidFill>
+                <a:latin typeface="Times New Roman"/>
+                <a:ea typeface="Times New Roman"/>
+                <a:cs typeface="Times New Roman"/>
+                <a:sym typeface="Times New Roman"/>
+              </a:rPr>
               <a:t>Is age &gt; 30?</a:t>
             </a:r>
-            <a:endParaRPr sz="1800"/>
+            <a:endParaRPr b="0" i="0" sz="1800" u="none" cap="none" strike="noStrike">
+              <a:solidFill>
+                <a:srgbClr val="000000"/>
+              </a:solidFill>
+              <a:latin typeface="Times New Roman"/>
+              <a:ea typeface="Times New Roman"/>
+              <a:cs typeface="Times New Roman"/>
+              <a:sym typeface="Times New Roman"/>
+            </a:endParaRPr>
           </a:p>
           <a:p>
-            <a:pPr indent="-342900" lvl="0" marL="457200" rtl="0" algn="l">
+            <a:pPr indent="-342900" lvl="0" marL="457200" marR="0" rtl="0" algn="l">
               <a:lnSpc>
                 <a:spcPct val="115000"/>
               </a:lnSpc>
@@ -14185,17 +14276,37 @@
               <a:spcAft>
                 <a:spcPts val="0"/>
               </a:spcAft>
+              <a:buClr>
+                <a:srgbClr val="000000"/>
+              </a:buClr>
               <a:buSzPts val="1800"/>
+              <a:buFont typeface="Times New Roman"/>
               <a:buChar char="●"/>
             </a:pPr>
             <a:r>
-              <a:rPr lang="en" sz="1800"/>
+              <a:rPr b="0" i="0" lang="en" sz="1800" u="none" cap="none" strike="noStrike">
+                <a:solidFill>
+                  <a:srgbClr val="000000"/>
+                </a:solidFill>
+                <a:latin typeface="Times New Roman"/>
+                <a:ea typeface="Times New Roman"/>
+                <a:cs typeface="Times New Roman"/>
+                <a:sym typeface="Times New Roman"/>
+              </a:rPr>
               <a:t>Is income high?</a:t>
             </a:r>
-            <a:endParaRPr sz="1800"/>
+            <a:endParaRPr b="0" i="0" sz="1800" u="none" cap="none" strike="noStrike">
+              <a:solidFill>
+                <a:srgbClr val="000000"/>
+              </a:solidFill>
+              <a:latin typeface="Times New Roman"/>
+              <a:ea typeface="Times New Roman"/>
+              <a:cs typeface="Times New Roman"/>
+              <a:sym typeface="Times New Roman"/>
+            </a:endParaRPr>
           </a:p>
           <a:p>
-            <a:pPr indent="-342900" lvl="0" marL="457200" rtl="0" algn="l">
+            <a:pPr indent="-342900" lvl="0" marL="457200" marR="0" rtl="0" algn="l">
               <a:lnSpc>
                 <a:spcPct val="115000"/>
               </a:lnSpc>
@@ -14205,17 +14316,37 @@
               <a:spcAft>
                 <a:spcPts val="0"/>
               </a:spcAft>
+              <a:buClr>
+                <a:srgbClr val="000000"/>
+              </a:buClr>
               <a:buSzPts val="1800"/>
+              <a:buFont typeface="Times New Roman"/>
               <a:buChar char="●"/>
             </a:pPr>
             <a:r>
-              <a:rPr lang="en" sz="1800"/>
+              <a:rPr b="0" i="0" lang="en" sz="1800" u="none" cap="none" strike="noStrike">
+                <a:solidFill>
+                  <a:srgbClr val="000000"/>
+                </a:solidFill>
+                <a:latin typeface="Times New Roman"/>
+                <a:ea typeface="Times New Roman"/>
+                <a:cs typeface="Times New Roman"/>
+                <a:sym typeface="Times New Roman"/>
+              </a:rPr>
               <a:t>Has the person bought before?</a:t>
             </a:r>
-            <a:endParaRPr sz="1800"/>
+            <a:endParaRPr b="0" i="0" sz="1800" u="none" cap="none" strike="noStrike">
+              <a:solidFill>
+                <a:srgbClr val="000000"/>
+              </a:solidFill>
+              <a:latin typeface="Times New Roman"/>
+              <a:ea typeface="Times New Roman"/>
+              <a:cs typeface="Times New Roman"/>
+              <a:sym typeface="Times New Roman"/>
+            </a:endParaRPr>
           </a:p>
           <a:p>
-            <a:pPr indent="0" lvl="0" marL="0" rtl="0" algn="l">
+            <a:pPr indent="0" lvl="0" marL="0" marR="0" rtl="0" algn="l">
               <a:lnSpc>
                 <a:spcPct val="158000"/>
               </a:lnSpc>
@@ -14225,12 +14356,17 @@
               <a:spcAft>
                 <a:spcPts val="0"/>
               </a:spcAft>
+              <a:buClr>
+                <a:srgbClr val="000000"/>
+              </a:buClr>
+              <a:buSzPts val="2150"/>
+              <a:buFont typeface="Arial"/>
               <a:buNone/>
             </a:pPr>
             <a:r>
               <a:t/>
             </a:r>
-            <a:endParaRPr sz="2150">
+            <a:endParaRPr b="0" i="0" sz="2150" u="none" cap="none" strike="noStrike">
               <a:solidFill>
                 <a:srgbClr val="273239"/>
               </a:solidFill>
@@ -14264,7 +14400,7 @@
             <a:r>
               <a:t/>
             </a:r>
-            <a:endParaRPr sz="1550">
+            <a:endParaRPr b="0" i="0" sz="1550" u="none" cap="none" strike="noStrike">
               <a:solidFill>
                 <a:srgbClr val="0A0A0A"/>
               </a:solidFill>
@@ -14306,7 +14442,7 @@
       </p:grpSpPr>
       <p:sp>
         <p:nvSpPr>
-          <p:cNvPr id="82" name="Google Shape;82;p16"/>
+          <p:cNvPr id="82" name="Google Shape;82;g3e04a08467b_0_1"/>
           <p:cNvSpPr txBox="1"/>
           <p:nvPr>
             <p:ph type="title"/>
@@ -14354,7 +14490,7 @@
       </p:sp>
       <p:pic>
         <p:nvPicPr>
-          <p:cNvPr id="83" name="Google Shape;83;p16"/>
+          <p:cNvPr id="83" name="Google Shape;83;g3e04a08467b_0_1"/>
           <p:cNvPicPr preferRelativeResize="0"/>
           <p:nvPr/>
         </p:nvPicPr>
@@ -14406,7 +14542,7 @@
       </p:grpSpPr>
       <p:sp>
         <p:nvSpPr>
-          <p:cNvPr id="88" name="Google Shape;88;p17"/>
+          <p:cNvPr id="88" name="Google Shape;88;g3d8b34d5aa0_0_11"/>
           <p:cNvSpPr txBox="1"/>
           <p:nvPr>
             <p:ph type="title"/>
@@ -14432,6 +14568,9 @@
           <a:lstStyle/>
           <a:p>
             <a:pPr indent="0" lvl="0" marL="0" rtl="0" algn="l">
+              <a:lnSpc>
+                <a:spcPct val="100000"/>
+              </a:lnSpc>
               <a:spcBef>
                 <a:spcPts val="0"/>
               </a:spcBef>
@@ -14470,7 +14609,7 @@
       </p:sp>
       <p:sp>
         <p:nvSpPr>
-          <p:cNvPr id="89" name="Google Shape;89;p17"/>
+          <p:cNvPr id="89" name="Google Shape;89;g3d8b34d5aa0_0_11"/>
           <p:cNvSpPr txBox="1"/>
           <p:nvPr/>
         </p:nvSpPr>
@@ -14493,7 +14632,7 @@
           </a:bodyPr>
           <a:lstStyle/>
           <a:p>
-            <a:pPr indent="0" lvl="0" marL="0" rtl="0" algn="l">
+            <a:pPr indent="0" lvl="0" marL="0" marR="0" rtl="0" algn="l">
               <a:lnSpc>
                 <a:spcPct val="115000"/>
               </a:lnSpc>
@@ -14503,16 +14642,37 @@
               <a:spcAft>
                 <a:spcPts val="0"/>
               </a:spcAft>
+              <a:buClr>
+                <a:srgbClr val="000000"/>
+              </a:buClr>
+              <a:buSzPts val="1800"/>
+              <a:buFont typeface="Arial"/>
               <a:buNone/>
             </a:pPr>
             <a:r>
-              <a:rPr b="1" lang="en" sz="1800"/>
+              <a:rPr b="1" i="0" lang="en" sz="1800" u="none" cap="none" strike="noStrike">
+                <a:solidFill>
+                  <a:srgbClr val="000000"/>
+                </a:solidFill>
+                <a:latin typeface="Times New Roman"/>
+                <a:ea typeface="Times New Roman"/>
+                <a:cs typeface="Times New Roman"/>
+                <a:sym typeface="Times New Roman"/>
+              </a:rPr>
               <a:t>1. Root Node</a:t>
             </a:r>
-            <a:endParaRPr b="1" sz="1800"/>
+            <a:endParaRPr b="1" i="0" sz="1800" u="none" cap="none" strike="noStrike">
+              <a:solidFill>
+                <a:srgbClr val="000000"/>
+              </a:solidFill>
+              <a:latin typeface="Times New Roman"/>
+              <a:ea typeface="Times New Roman"/>
+              <a:cs typeface="Times New Roman"/>
+              <a:sym typeface="Times New Roman"/>
+            </a:endParaRPr>
           </a:p>
           <a:p>
-            <a:pPr indent="-342900" lvl="0" marL="457200" rtl="0" algn="l">
+            <a:pPr indent="-342900" lvl="0" marL="457200" marR="0" rtl="0" algn="l">
               <a:lnSpc>
                 <a:spcPct val="115000"/>
               </a:lnSpc>
@@ -14522,17 +14682,37 @@
               <a:spcAft>
                 <a:spcPts val="0"/>
               </a:spcAft>
+              <a:buClr>
+                <a:srgbClr val="000000"/>
+              </a:buClr>
               <a:buSzPts val="1800"/>
+              <a:buFont typeface="Times New Roman"/>
               <a:buChar char="●"/>
             </a:pPr>
             <a:r>
-              <a:rPr lang="en" sz="1800"/>
+              <a:rPr b="0" i="0" lang="en" sz="1800" u="none" cap="none" strike="noStrike">
+                <a:solidFill>
+                  <a:srgbClr val="000000"/>
+                </a:solidFill>
+                <a:latin typeface="Times New Roman"/>
+                <a:ea typeface="Times New Roman"/>
+                <a:cs typeface="Times New Roman"/>
+                <a:sym typeface="Times New Roman"/>
+              </a:rPr>
               <a:t>The starting point of the tree.</a:t>
             </a:r>
-            <a:endParaRPr sz="1800"/>
+            <a:endParaRPr b="0" i="0" sz="1800" u="none" cap="none" strike="noStrike">
+              <a:solidFill>
+                <a:srgbClr val="000000"/>
+              </a:solidFill>
+              <a:latin typeface="Times New Roman"/>
+              <a:ea typeface="Times New Roman"/>
+              <a:cs typeface="Times New Roman"/>
+              <a:sym typeface="Times New Roman"/>
+            </a:endParaRPr>
           </a:p>
           <a:p>
-            <a:pPr indent="-342900" lvl="0" marL="457200" rtl="0" algn="l">
+            <a:pPr indent="-342900" lvl="0" marL="457200" marR="0" rtl="0" algn="l">
               <a:lnSpc>
                 <a:spcPct val="115000"/>
               </a:lnSpc>
@@ -14542,17 +14722,37 @@
               <a:spcAft>
                 <a:spcPts val="0"/>
               </a:spcAft>
+              <a:buClr>
+                <a:srgbClr val="000000"/>
+              </a:buClr>
               <a:buSzPts val="1800"/>
+              <a:buFont typeface="Times New Roman"/>
               <a:buChar char="●"/>
             </a:pPr>
             <a:r>
-              <a:rPr lang="en" sz="1800"/>
+              <a:rPr b="0" i="0" lang="en" sz="1800" u="none" cap="none" strike="noStrike">
+                <a:solidFill>
+                  <a:srgbClr val="000000"/>
+                </a:solidFill>
+                <a:latin typeface="Times New Roman"/>
+                <a:ea typeface="Times New Roman"/>
+                <a:cs typeface="Times New Roman"/>
+                <a:sym typeface="Times New Roman"/>
+              </a:rPr>
               <a:t>Represents the entire dataset.</a:t>
             </a:r>
-            <a:endParaRPr sz="1800"/>
+            <a:endParaRPr b="0" i="0" sz="1800" u="none" cap="none" strike="noStrike">
+              <a:solidFill>
+                <a:srgbClr val="000000"/>
+              </a:solidFill>
+              <a:latin typeface="Times New Roman"/>
+              <a:ea typeface="Times New Roman"/>
+              <a:cs typeface="Times New Roman"/>
+              <a:sym typeface="Times New Roman"/>
+            </a:endParaRPr>
           </a:p>
           <a:p>
-            <a:pPr indent="-342900" lvl="0" marL="457200" rtl="0" algn="l">
+            <a:pPr indent="-342900" lvl="0" marL="457200" marR="0" rtl="0" algn="l">
               <a:lnSpc>
                 <a:spcPct val="115000"/>
               </a:lnSpc>
@@ -14562,17 +14762,37 @@
               <a:spcAft>
                 <a:spcPts val="0"/>
               </a:spcAft>
+              <a:buClr>
+                <a:srgbClr val="000000"/>
+              </a:buClr>
               <a:buSzPts val="1800"/>
+              <a:buFont typeface="Times New Roman"/>
               <a:buChar char="●"/>
             </a:pPr>
             <a:r>
-              <a:rPr lang="en" sz="1800"/>
+              <a:rPr b="0" i="0" lang="en" sz="1800" u="none" cap="none" strike="noStrike">
+                <a:solidFill>
+                  <a:srgbClr val="000000"/>
+                </a:solidFill>
+                <a:latin typeface="Times New Roman"/>
+                <a:ea typeface="Times New Roman"/>
+                <a:cs typeface="Times New Roman"/>
+                <a:sym typeface="Times New Roman"/>
+              </a:rPr>
               <a:t>First decision is made here.</a:t>
             </a:r>
-            <a:endParaRPr sz="1800"/>
+            <a:endParaRPr b="0" i="0" sz="1800" u="none" cap="none" strike="noStrike">
+              <a:solidFill>
+                <a:srgbClr val="000000"/>
+              </a:solidFill>
+              <a:latin typeface="Times New Roman"/>
+              <a:ea typeface="Times New Roman"/>
+              <a:cs typeface="Times New Roman"/>
+              <a:sym typeface="Times New Roman"/>
+            </a:endParaRPr>
           </a:p>
           <a:p>
-            <a:pPr indent="0" lvl="0" marL="0" rtl="0" algn="l">
+            <a:pPr indent="0" lvl="0" marL="0" marR="0" rtl="0" algn="l">
               <a:lnSpc>
                 <a:spcPct val="115000"/>
               </a:lnSpc>
@@ -14582,16 +14802,37 @@
               <a:spcAft>
                 <a:spcPts val="0"/>
               </a:spcAft>
+              <a:buClr>
+                <a:srgbClr val="000000"/>
+              </a:buClr>
+              <a:buSzPts val="1800"/>
+              <a:buFont typeface="Arial"/>
               <a:buNone/>
             </a:pPr>
             <a:r>
-              <a:rPr b="1" lang="en" sz="1800"/>
+              <a:rPr b="1" i="0" lang="en" sz="1800" u="none" cap="none" strike="noStrike">
+                <a:solidFill>
+                  <a:srgbClr val="000000"/>
+                </a:solidFill>
+                <a:latin typeface="Times New Roman"/>
+                <a:ea typeface="Times New Roman"/>
+                <a:cs typeface="Times New Roman"/>
+                <a:sym typeface="Times New Roman"/>
+              </a:rPr>
               <a:t>2. Internal Nodes</a:t>
             </a:r>
-            <a:endParaRPr b="1" sz="1800"/>
+            <a:endParaRPr b="1" i="0" sz="1800" u="none" cap="none" strike="noStrike">
+              <a:solidFill>
+                <a:srgbClr val="000000"/>
+              </a:solidFill>
+              <a:latin typeface="Times New Roman"/>
+              <a:ea typeface="Times New Roman"/>
+              <a:cs typeface="Times New Roman"/>
+              <a:sym typeface="Times New Roman"/>
+            </a:endParaRPr>
           </a:p>
           <a:p>
-            <a:pPr indent="-342900" lvl="0" marL="457200" rtl="0" algn="l">
+            <a:pPr indent="-342900" lvl="0" marL="457200" marR="0" rtl="0" algn="l">
               <a:lnSpc>
                 <a:spcPct val="115000"/>
               </a:lnSpc>
@@ -14601,17 +14842,37 @@
               <a:spcAft>
                 <a:spcPts val="0"/>
               </a:spcAft>
+              <a:buClr>
+                <a:srgbClr val="000000"/>
+              </a:buClr>
               <a:buSzPts val="1800"/>
+              <a:buFont typeface="Times New Roman"/>
               <a:buChar char="●"/>
             </a:pPr>
             <a:r>
-              <a:rPr lang="en" sz="1800"/>
+              <a:rPr b="0" i="0" lang="en" sz="1800" u="none" cap="none" strike="noStrike">
+                <a:solidFill>
+                  <a:srgbClr val="000000"/>
+                </a:solidFill>
+                <a:latin typeface="Times New Roman"/>
+                <a:ea typeface="Times New Roman"/>
+                <a:cs typeface="Times New Roman"/>
+                <a:sym typeface="Times New Roman"/>
+              </a:rPr>
               <a:t>These are decision points (questions).</a:t>
             </a:r>
-            <a:endParaRPr sz="1800"/>
+            <a:endParaRPr b="0" i="0" sz="1800" u="none" cap="none" strike="noStrike">
+              <a:solidFill>
+                <a:srgbClr val="000000"/>
+              </a:solidFill>
+              <a:latin typeface="Times New Roman"/>
+              <a:ea typeface="Times New Roman"/>
+              <a:cs typeface="Times New Roman"/>
+              <a:sym typeface="Times New Roman"/>
+            </a:endParaRPr>
           </a:p>
           <a:p>
-            <a:pPr indent="-342900" lvl="0" marL="457200" rtl="0" algn="l">
+            <a:pPr indent="-342900" lvl="0" marL="457200" marR="0" rtl="0" algn="l">
               <a:lnSpc>
                 <a:spcPct val="115000"/>
               </a:lnSpc>
@@ -14621,14 +14882,34 @@
               <a:spcAft>
                 <a:spcPts val="0"/>
               </a:spcAft>
+              <a:buClr>
+                <a:srgbClr val="000000"/>
+              </a:buClr>
               <a:buSzPts val="1800"/>
+              <a:buFont typeface="Times New Roman"/>
               <a:buChar char="●"/>
             </a:pPr>
             <a:r>
-              <a:rPr lang="en" sz="1800"/>
+              <a:rPr b="0" i="0" lang="en" sz="1800" u="none" cap="none" strike="noStrike">
+                <a:solidFill>
+                  <a:srgbClr val="000000"/>
+                </a:solidFill>
+                <a:latin typeface="Times New Roman"/>
+                <a:ea typeface="Times New Roman"/>
+                <a:cs typeface="Times New Roman"/>
+                <a:sym typeface="Times New Roman"/>
+              </a:rPr>
               <a:t>Each node splits data based on a condition.</a:t>
             </a:r>
-            <a:endParaRPr sz="1800"/>
+            <a:endParaRPr b="0" i="0" sz="1800" u="none" cap="none" strike="noStrike">
+              <a:solidFill>
+                <a:srgbClr val="000000"/>
+              </a:solidFill>
+              <a:latin typeface="Times New Roman"/>
+              <a:ea typeface="Times New Roman"/>
+              <a:cs typeface="Times New Roman"/>
+              <a:sym typeface="Times New Roman"/>
+            </a:endParaRPr>
           </a:p>
           <a:p>
             <a:pPr indent="0" lvl="0" marL="0" marR="0" rtl="0" algn="just">
@@ -14651,7 +14932,7 @@
             <a:r>
               <a:t/>
             </a:r>
-            <a:endParaRPr sz="1550">
+            <a:endParaRPr b="0" i="0" sz="1550" u="none" cap="none" strike="noStrike">
               <a:solidFill>
                 <a:srgbClr val="0A0A0A"/>
               </a:solidFill>
@@ -14693,7 +14974,7 @@
       </p:grpSpPr>
       <p:sp>
         <p:nvSpPr>
-          <p:cNvPr id="94" name="Google Shape;94;p18"/>
+          <p:cNvPr id="94" name="Google Shape;94;g3d8b34d5aa0_0_17"/>
           <p:cNvSpPr txBox="1"/>
           <p:nvPr>
             <p:ph type="title"/>
@@ -14719,6 +15000,9 @@
           <a:lstStyle/>
           <a:p>
             <a:pPr indent="0" lvl="0" marL="0" rtl="0" algn="l">
+              <a:lnSpc>
+                <a:spcPct val="100000"/>
+              </a:lnSpc>
               <a:spcBef>
                 <a:spcPts val="0"/>
               </a:spcBef>
@@ -14757,7 +15041,7 @@
       </p:sp>
       <p:sp>
         <p:nvSpPr>
-          <p:cNvPr id="95" name="Google Shape;95;p18"/>
+          <p:cNvPr id="95" name="Google Shape;95;g3d8b34d5aa0_0_17"/>
           <p:cNvSpPr txBox="1"/>
           <p:nvPr/>
         </p:nvSpPr>
@@ -14780,7 +15064,7 @@
           </a:bodyPr>
           <a:lstStyle/>
           <a:p>
-            <a:pPr indent="0" lvl="0" marL="0" rtl="0" algn="l">
+            <a:pPr indent="0" lvl="0" marL="0" marR="0" rtl="0" algn="l">
               <a:lnSpc>
                 <a:spcPct val="115000"/>
               </a:lnSpc>
@@ -14790,16 +15074,37 @@
               <a:spcAft>
                 <a:spcPts val="0"/>
               </a:spcAft>
+              <a:buClr>
+                <a:srgbClr val="000000"/>
+              </a:buClr>
+              <a:buSzPts val="1800"/>
+              <a:buFont typeface="Arial"/>
               <a:buNone/>
             </a:pPr>
             <a:r>
-              <a:rPr b="1" lang="en" sz="1800"/>
+              <a:rPr b="1" i="0" lang="en" sz="1800" u="none" cap="none" strike="noStrike">
+                <a:solidFill>
+                  <a:srgbClr val="000000"/>
+                </a:solidFill>
+                <a:latin typeface="Times New Roman"/>
+                <a:ea typeface="Times New Roman"/>
+                <a:cs typeface="Times New Roman"/>
+                <a:sym typeface="Times New Roman"/>
+              </a:rPr>
               <a:t>3. Branches</a:t>
             </a:r>
-            <a:endParaRPr b="1" sz="1800"/>
+            <a:endParaRPr b="1" i="0" sz="1800" u="none" cap="none" strike="noStrike">
+              <a:solidFill>
+                <a:srgbClr val="000000"/>
+              </a:solidFill>
+              <a:latin typeface="Times New Roman"/>
+              <a:ea typeface="Times New Roman"/>
+              <a:cs typeface="Times New Roman"/>
+              <a:sym typeface="Times New Roman"/>
+            </a:endParaRPr>
           </a:p>
           <a:p>
-            <a:pPr indent="-342900" lvl="0" marL="457200" rtl="0" algn="l">
+            <a:pPr indent="-342900" lvl="0" marL="457200" marR="0" rtl="0" algn="l">
               <a:lnSpc>
                 <a:spcPct val="115000"/>
               </a:lnSpc>
@@ -14809,17 +15114,37 @@
               <a:spcAft>
                 <a:spcPts val="0"/>
               </a:spcAft>
+              <a:buClr>
+                <a:srgbClr val="000000"/>
+              </a:buClr>
               <a:buSzPts val="1800"/>
+              <a:buFont typeface="Times New Roman"/>
               <a:buChar char="●"/>
             </a:pPr>
             <a:r>
-              <a:rPr lang="en" sz="1800"/>
+              <a:rPr b="0" i="0" lang="en" sz="1800" u="none" cap="none" strike="noStrike">
+                <a:solidFill>
+                  <a:srgbClr val="000000"/>
+                </a:solidFill>
+                <a:latin typeface="Times New Roman"/>
+                <a:ea typeface="Times New Roman"/>
+                <a:cs typeface="Times New Roman"/>
+                <a:sym typeface="Times New Roman"/>
+              </a:rPr>
               <a:t>The outcomes of decisions (Yes/No, True/False).</a:t>
             </a:r>
-            <a:endParaRPr sz="1800"/>
+            <a:endParaRPr b="0" i="0" sz="1800" u="none" cap="none" strike="noStrike">
+              <a:solidFill>
+                <a:srgbClr val="000000"/>
+              </a:solidFill>
+              <a:latin typeface="Times New Roman"/>
+              <a:ea typeface="Times New Roman"/>
+              <a:cs typeface="Times New Roman"/>
+              <a:sym typeface="Times New Roman"/>
+            </a:endParaRPr>
           </a:p>
           <a:p>
-            <a:pPr indent="-342900" lvl="0" marL="457200" rtl="0" algn="l">
+            <a:pPr indent="-342900" lvl="0" marL="457200" marR="0" rtl="0" algn="l">
               <a:lnSpc>
                 <a:spcPct val="115000"/>
               </a:lnSpc>
@@ -14829,17 +15154,37 @@
               <a:spcAft>
                 <a:spcPts val="0"/>
               </a:spcAft>
+              <a:buClr>
+                <a:srgbClr val="000000"/>
+              </a:buClr>
               <a:buSzPts val="1800"/>
+              <a:buFont typeface="Times New Roman"/>
               <a:buChar char="●"/>
             </a:pPr>
             <a:r>
-              <a:rPr lang="en" sz="1800"/>
+              <a:rPr b="0" i="0" lang="en" sz="1800" u="none" cap="none" strike="noStrike">
+                <a:solidFill>
+                  <a:srgbClr val="000000"/>
+                </a:solidFill>
+                <a:latin typeface="Times New Roman"/>
+                <a:ea typeface="Times New Roman"/>
+                <a:cs typeface="Times New Roman"/>
+                <a:sym typeface="Times New Roman"/>
+              </a:rPr>
               <a:t>Connect nodes and show the flow.</a:t>
             </a:r>
-            <a:endParaRPr sz="1800"/>
+            <a:endParaRPr b="0" i="0" sz="1800" u="none" cap="none" strike="noStrike">
+              <a:solidFill>
+                <a:srgbClr val="000000"/>
+              </a:solidFill>
+              <a:latin typeface="Times New Roman"/>
+              <a:ea typeface="Times New Roman"/>
+              <a:cs typeface="Times New Roman"/>
+              <a:sym typeface="Times New Roman"/>
+            </a:endParaRPr>
           </a:p>
           <a:p>
-            <a:pPr indent="0" lvl="0" marL="0" rtl="0" algn="l">
+            <a:pPr indent="0" lvl="0" marL="0" marR="0" rtl="0" algn="l">
               <a:lnSpc>
                 <a:spcPct val="115000"/>
               </a:lnSpc>
@@ -14849,16 +15194,37 @@
               <a:spcAft>
                 <a:spcPts val="0"/>
               </a:spcAft>
+              <a:buClr>
+                <a:srgbClr val="000000"/>
+              </a:buClr>
+              <a:buSzPts val="1800"/>
+              <a:buFont typeface="Arial"/>
               <a:buNone/>
             </a:pPr>
             <a:r>
-              <a:rPr b="1" lang="en" sz="1800"/>
+              <a:rPr b="1" i="0" lang="en" sz="1800" u="none" cap="none" strike="noStrike">
+                <a:solidFill>
+                  <a:srgbClr val="000000"/>
+                </a:solidFill>
+                <a:latin typeface="Times New Roman"/>
+                <a:ea typeface="Times New Roman"/>
+                <a:cs typeface="Times New Roman"/>
+                <a:sym typeface="Times New Roman"/>
+              </a:rPr>
               <a:t>4. Leaf Nodes (Terminal Nodes)</a:t>
             </a:r>
-            <a:endParaRPr b="1" sz="1800"/>
+            <a:endParaRPr b="1" i="0" sz="1800" u="none" cap="none" strike="noStrike">
+              <a:solidFill>
+                <a:srgbClr val="000000"/>
+              </a:solidFill>
+              <a:latin typeface="Times New Roman"/>
+              <a:ea typeface="Times New Roman"/>
+              <a:cs typeface="Times New Roman"/>
+              <a:sym typeface="Times New Roman"/>
+            </a:endParaRPr>
           </a:p>
           <a:p>
-            <a:pPr indent="-342900" lvl="0" marL="457200" rtl="0" algn="l">
+            <a:pPr indent="-342900" lvl="0" marL="457200" marR="0" rtl="0" algn="l">
               <a:lnSpc>
                 <a:spcPct val="115000"/>
               </a:lnSpc>
@@ -14868,17 +15234,37 @@
               <a:spcAft>
                 <a:spcPts val="0"/>
               </a:spcAft>
+              <a:buClr>
+                <a:srgbClr val="000000"/>
+              </a:buClr>
               <a:buSzPts val="1800"/>
+              <a:buFont typeface="Times New Roman"/>
               <a:buChar char="●"/>
             </a:pPr>
             <a:r>
-              <a:rPr lang="en" sz="1800"/>
+              <a:rPr b="0" i="0" lang="en" sz="1800" u="none" cap="none" strike="noStrike">
+                <a:solidFill>
+                  <a:srgbClr val="000000"/>
+                </a:solidFill>
+                <a:latin typeface="Times New Roman"/>
+                <a:ea typeface="Times New Roman"/>
+                <a:cs typeface="Times New Roman"/>
+                <a:sym typeface="Times New Roman"/>
+              </a:rPr>
               <a:t>Final output or prediction.</a:t>
             </a:r>
-            <a:endParaRPr sz="1800"/>
+            <a:endParaRPr b="0" i="0" sz="1800" u="none" cap="none" strike="noStrike">
+              <a:solidFill>
+                <a:srgbClr val="000000"/>
+              </a:solidFill>
+              <a:latin typeface="Times New Roman"/>
+              <a:ea typeface="Times New Roman"/>
+              <a:cs typeface="Times New Roman"/>
+              <a:sym typeface="Times New Roman"/>
+            </a:endParaRPr>
           </a:p>
           <a:p>
-            <a:pPr indent="-342900" lvl="0" marL="457200" rtl="0" algn="l">
+            <a:pPr indent="-342900" lvl="0" marL="457200" marR="0" rtl="0" algn="l">
               <a:lnSpc>
                 <a:spcPct val="115000"/>
               </a:lnSpc>
@@ -14888,14 +15274,34 @@
               <a:spcAft>
                 <a:spcPts val="0"/>
               </a:spcAft>
+              <a:buClr>
+                <a:srgbClr val="000000"/>
+              </a:buClr>
               <a:buSzPts val="1800"/>
+              <a:buFont typeface="Times New Roman"/>
               <a:buChar char="●"/>
             </a:pPr>
             <a:r>
-              <a:rPr lang="en" sz="1800"/>
+              <a:rPr b="0" i="0" lang="en" sz="1800" u="none" cap="none" strike="noStrike">
+                <a:solidFill>
+                  <a:srgbClr val="000000"/>
+                </a:solidFill>
+                <a:latin typeface="Times New Roman"/>
+                <a:ea typeface="Times New Roman"/>
+                <a:cs typeface="Times New Roman"/>
+                <a:sym typeface="Times New Roman"/>
+              </a:rPr>
               <a:t>Example: “Buy” or “Don’t Buy”.</a:t>
             </a:r>
-            <a:endParaRPr b="1" sz="1800"/>
+            <a:endParaRPr b="1" i="0" sz="1800" u="none" cap="none" strike="noStrike">
+              <a:solidFill>
+                <a:srgbClr val="000000"/>
+              </a:solidFill>
+              <a:latin typeface="Times New Roman"/>
+              <a:ea typeface="Times New Roman"/>
+              <a:cs typeface="Times New Roman"/>
+              <a:sym typeface="Times New Roman"/>
+            </a:endParaRPr>
           </a:p>
           <a:p>
             <a:pPr indent="0" lvl="0" marL="0" marR="0" rtl="0" algn="just">
@@ -14918,7 +15324,7 @@
             <a:r>
               <a:t/>
             </a:r>
-            <a:endParaRPr sz="1550">
+            <a:endParaRPr b="0" i="0" sz="1550" u="none" cap="none" strike="noStrike">
               <a:solidFill>
                 <a:srgbClr val="0A0A0A"/>
               </a:solidFill>
@@ -14960,7 +15366,7 @@
       </p:grpSpPr>
       <p:sp>
         <p:nvSpPr>
-          <p:cNvPr id="100" name="Google Shape;100;p19"/>
+          <p:cNvPr id="100" name="Google Shape;100;g3d8b34d5aa0_0_22"/>
           <p:cNvSpPr txBox="1"/>
           <p:nvPr>
             <p:ph type="title"/>
@@ -14986,6 +15392,9 @@
           <a:lstStyle/>
           <a:p>
             <a:pPr indent="0" lvl="0" marL="0" rtl="0" algn="l">
+              <a:lnSpc>
+                <a:spcPct val="100000"/>
+              </a:lnSpc>
               <a:spcBef>
                 <a:spcPts val="0"/>
               </a:spcBef>
@@ -15024,7 +15433,7 @@
       </p:sp>
       <p:sp>
         <p:nvSpPr>
-          <p:cNvPr id="101" name="Google Shape;101;p19"/>
+          <p:cNvPr id="101" name="Google Shape;101;g3d8b34d5aa0_0_22"/>
           <p:cNvSpPr txBox="1"/>
           <p:nvPr/>
         </p:nvSpPr>
@@ -15047,7 +15456,7 @@
           </a:bodyPr>
           <a:lstStyle/>
           <a:p>
-            <a:pPr indent="0" lvl="0" marL="0" rtl="0" algn="l">
+            <a:pPr indent="0" lvl="0" marL="0" marR="0" rtl="0" algn="l">
               <a:lnSpc>
                 <a:spcPct val="115000"/>
               </a:lnSpc>
@@ -15057,16 +15466,37 @@
               <a:spcAft>
                 <a:spcPts val="0"/>
               </a:spcAft>
+              <a:buClr>
+                <a:srgbClr val="000000"/>
+              </a:buClr>
+              <a:buSzPts val="1900"/>
+              <a:buFont typeface="Arial"/>
               <a:buNone/>
             </a:pPr>
             <a:r>
-              <a:rPr b="1" lang="en" sz="1900"/>
+              <a:rPr b="1" i="0" lang="en" sz="1900" u="none" cap="none" strike="noStrike">
+                <a:solidFill>
+                  <a:srgbClr val="000000"/>
+                </a:solidFill>
+                <a:latin typeface="Times New Roman"/>
+                <a:ea typeface="Times New Roman"/>
+                <a:cs typeface="Times New Roman"/>
+                <a:sym typeface="Times New Roman"/>
+              </a:rPr>
               <a:t> How It Works (Simple Steps)</a:t>
             </a:r>
-            <a:endParaRPr b="1" sz="1900"/>
+            <a:endParaRPr b="1" i="0" sz="1900" u="none" cap="none" strike="noStrike">
+              <a:solidFill>
+                <a:srgbClr val="000000"/>
+              </a:solidFill>
+              <a:latin typeface="Times New Roman"/>
+              <a:ea typeface="Times New Roman"/>
+              <a:cs typeface="Times New Roman"/>
+              <a:sym typeface="Times New Roman"/>
+            </a:endParaRPr>
           </a:p>
           <a:p>
-            <a:pPr indent="-349250" lvl="0" marL="457200" rtl="0" algn="l">
+            <a:pPr indent="-349250" lvl="0" marL="457200" marR="0" rtl="0" algn="l">
               <a:lnSpc>
                 <a:spcPct val="115000"/>
               </a:lnSpc>
@@ -15076,17 +15506,37 @@
               <a:spcAft>
                 <a:spcPts val="0"/>
               </a:spcAft>
+              <a:buClr>
+                <a:srgbClr val="000000"/>
+              </a:buClr>
               <a:buSzPts val="1900"/>
+              <a:buFont typeface="Times New Roman"/>
               <a:buAutoNum type="arabicPeriod"/>
             </a:pPr>
             <a:r>
-              <a:rPr lang="en" sz="1900"/>
+              <a:rPr b="0" i="0" lang="en" sz="1900" u="none" cap="none" strike="noStrike">
+                <a:solidFill>
+                  <a:srgbClr val="000000"/>
+                </a:solidFill>
+                <a:latin typeface="Times New Roman"/>
+                <a:ea typeface="Times New Roman"/>
+                <a:cs typeface="Times New Roman"/>
+                <a:sym typeface="Times New Roman"/>
+              </a:rPr>
               <a:t>Pick the best feature to split the data.</a:t>
             </a:r>
-            <a:endParaRPr sz="1900"/>
+            <a:endParaRPr b="0" i="0" sz="1900" u="none" cap="none" strike="noStrike">
+              <a:solidFill>
+                <a:srgbClr val="000000"/>
+              </a:solidFill>
+              <a:latin typeface="Times New Roman"/>
+              <a:ea typeface="Times New Roman"/>
+              <a:cs typeface="Times New Roman"/>
+              <a:sym typeface="Times New Roman"/>
+            </a:endParaRPr>
           </a:p>
           <a:p>
-            <a:pPr indent="-349250" lvl="0" marL="457200" rtl="0" algn="l">
+            <a:pPr indent="-349250" lvl="0" marL="457200" marR="0" rtl="0" algn="l">
               <a:lnSpc>
                 <a:spcPct val="115000"/>
               </a:lnSpc>
@@ -15096,17 +15546,37 @@
               <a:spcAft>
                 <a:spcPts val="0"/>
               </a:spcAft>
+              <a:buClr>
+                <a:srgbClr val="000000"/>
+              </a:buClr>
               <a:buSzPts val="1900"/>
+              <a:buFont typeface="Times New Roman"/>
               <a:buAutoNum type="arabicPeriod"/>
             </a:pPr>
             <a:r>
-              <a:rPr lang="en" sz="1900"/>
+              <a:rPr b="0" i="0" lang="en" sz="1900" u="none" cap="none" strike="noStrike">
+                <a:solidFill>
+                  <a:srgbClr val="000000"/>
+                </a:solidFill>
+                <a:latin typeface="Times New Roman"/>
+                <a:ea typeface="Times New Roman"/>
+                <a:cs typeface="Times New Roman"/>
+                <a:sym typeface="Times New Roman"/>
+              </a:rPr>
               <a:t>Divide the dataset based on that feature.</a:t>
             </a:r>
-            <a:endParaRPr sz="1900"/>
+            <a:endParaRPr b="0" i="0" sz="1900" u="none" cap="none" strike="noStrike">
+              <a:solidFill>
+                <a:srgbClr val="000000"/>
+              </a:solidFill>
+              <a:latin typeface="Times New Roman"/>
+              <a:ea typeface="Times New Roman"/>
+              <a:cs typeface="Times New Roman"/>
+              <a:sym typeface="Times New Roman"/>
+            </a:endParaRPr>
           </a:p>
           <a:p>
-            <a:pPr indent="-349250" lvl="0" marL="457200" rtl="0" algn="l">
+            <a:pPr indent="-349250" lvl="0" marL="457200" marR="0" rtl="0" algn="l">
               <a:lnSpc>
                 <a:spcPct val="115000"/>
               </a:lnSpc>
@@ -15116,17 +15586,37 @@
               <a:spcAft>
                 <a:spcPts val="0"/>
               </a:spcAft>
+              <a:buClr>
+                <a:srgbClr val="000000"/>
+              </a:buClr>
               <a:buSzPts val="1900"/>
+              <a:buFont typeface="Times New Roman"/>
               <a:buAutoNum type="arabicPeriod"/>
             </a:pPr>
             <a:r>
-              <a:rPr lang="en" sz="1900"/>
+              <a:rPr b="0" i="0" lang="en" sz="1900" u="none" cap="none" strike="noStrike">
+                <a:solidFill>
+                  <a:srgbClr val="000000"/>
+                </a:solidFill>
+                <a:latin typeface="Times New Roman"/>
+                <a:ea typeface="Times New Roman"/>
+                <a:cs typeface="Times New Roman"/>
+                <a:sym typeface="Times New Roman"/>
+              </a:rPr>
               <a:t>Repeat the process for each subset.</a:t>
             </a:r>
-            <a:endParaRPr sz="1900"/>
+            <a:endParaRPr b="0" i="0" sz="1900" u="none" cap="none" strike="noStrike">
+              <a:solidFill>
+                <a:srgbClr val="000000"/>
+              </a:solidFill>
+              <a:latin typeface="Times New Roman"/>
+              <a:ea typeface="Times New Roman"/>
+              <a:cs typeface="Times New Roman"/>
+              <a:sym typeface="Times New Roman"/>
+            </a:endParaRPr>
           </a:p>
           <a:p>
-            <a:pPr indent="-349250" lvl="0" marL="457200" rtl="0" algn="l">
+            <a:pPr indent="-349250" lvl="0" marL="457200" marR="0" rtl="0" algn="l">
               <a:lnSpc>
                 <a:spcPct val="115000"/>
               </a:lnSpc>
@@ -15136,17 +15626,37 @@
               <a:spcAft>
                 <a:spcPts val="0"/>
               </a:spcAft>
+              <a:buClr>
+                <a:srgbClr val="000000"/>
+              </a:buClr>
               <a:buSzPts val="1900"/>
+              <a:buFont typeface="Times New Roman"/>
               <a:buAutoNum type="arabicPeriod"/>
             </a:pPr>
             <a:r>
-              <a:rPr lang="en" sz="1900"/>
+              <a:rPr b="0" i="0" lang="en" sz="1900" u="none" cap="none" strike="noStrike">
+                <a:solidFill>
+                  <a:srgbClr val="000000"/>
+                </a:solidFill>
+                <a:latin typeface="Times New Roman"/>
+                <a:ea typeface="Times New Roman"/>
+                <a:cs typeface="Times New Roman"/>
+                <a:sym typeface="Times New Roman"/>
+              </a:rPr>
               <a:t>Stop when:</a:t>
             </a:r>
-            <a:endParaRPr sz="1900"/>
+            <a:endParaRPr b="0" i="0" sz="1900" u="none" cap="none" strike="noStrike">
+              <a:solidFill>
+                <a:srgbClr val="000000"/>
+              </a:solidFill>
+              <a:latin typeface="Times New Roman"/>
+              <a:ea typeface="Times New Roman"/>
+              <a:cs typeface="Times New Roman"/>
+              <a:sym typeface="Times New Roman"/>
+            </a:endParaRPr>
           </a:p>
           <a:p>
-            <a:pPr indent="-349250" lvl="1" marL="914400" rtl="0" algn="l">
+            <a:pPr indent="-349250" lvl="1" marL="914400" marR="0" rtl="0" algn="l">
               <a:lnSpc>
                 <a:spcPct val="115000"/>
               </a:lnSpc>
@@ -15156,17 +15666,37 @@
               <a:spcAft>
                 <a:spcPts val="0"/>
               </a:spcAft>
+              <a:buClr>
+                <a:srgbClr val="000000"/>
+              </a:buClr>
               <a:buSzPts val="1900"/>
+              <a:buFont typeface="Times New Roman"/>
               <a:buChar char="○"/>
             </a:pPr>
             <a:r>
-              <a:rPr lang="en" sz="1900"/>
+              <a:rPr b="0" i="0" lang="en" sz="1900" u="none" cap="none" strike="noStrike">
+                <a:solidFill>
+                  <a:srgbClr val="000000"/>
+                </a:solidFill>
+                <a:latin typeface="Times New Roman"/>
+                <a:ea typeface="Times New Roman"/>
+                <a:cs typeface="Times New Roman"/>
+                <a:sym typeface="Times New Roman"/>
+              </a:rPr>
               <a:t>Data is pure (all same class), or</a:t>
             </a:r>
-            <a:endParaRPr sz="1900"/>
+            <a:endParaRPr b="0" i="0" sz="1900" u="none" cap="none" strike="noStrike">
+              <a:solidFill>
+                <a:srgbClr val="000000"/>
+              </a:solidFill>
+              <a:latin typeface="Times New Roman"/>
+              <a:ea typeface="Times New Roman"/>
+              <a:cs typeface="Times New Roman"/>
+              <a:sym typeface="Times New Roman"/>
+            </a:endParaRPr>
           </a:p>
           <a:p>
-            <a:pPr indent="-349250" lvl="1" marL="914400" rtl="0" algn="l">
+            <a:pPr indent="-349250" lvl="1" marL="914400" marR="0" rtl="0" algn="l">
               <a:lnSpc>
                 <a:spcPct val="115000"/>
               </a:lnSpc>
@@ -15176,14 +15706,34 @@
               <a:spcAft>
                 <a:spcPts val="0"/>
               </a:spcAft>
+              <a:buClr>
+                <a:srgbClr val="000000"/>
+              </a:buClr>
               <a:buSzPts val="1900"/>
+              <a:buFont typeface="Times New Roman"/>
               <a:buChar char="○"/>
             </a:pPr>
             <a:r>
-              <a:rPr lang="en" sz="1900"/>
+              <a:rPr b="0" i="0" lang="en" sz="1900" u="none" cap="none" strike="noStrike">
+                <a:solidFill>
+                  <a:srgbClr val="000000"/>
+                </a:solidFill>
+                <a:latin typeface="Times New Roman"/>
+                <a:ea typeface="Times New Roman"/>
+                <a:cs typeface="Times New Roman"/>
+                <a:sym typeface="Times New Roman"/>
+              </a:rPr>
               <a:t>A stopping rule is reached.</a:t>
             </a:r>
-            <a:endParaRPr b="1" sz="1900"/>
+            <a:endParaRPr b="1" i="0" sz="1900" u="none" cap="none" strike="noStrike">
+              <a:solidFill>
+                <a:srgbClr val="000000"/>
+              </a:solidFill>
+              <a:latin typeface="Times New Roman"/>
+              <a:ea typeface="Times New Roman"/>
+              <a:cs typeface="Times New Roman"/>
+              <a:sym typeface="Times New Roman"/>
+            </a:endParaRPr>
           </a:p>
           <a:p>
             <a:pPr indent="0" lvl="0" marL="0" marR="0" rtl="0" algn="just">
@@ -15206,7 +15756,7 @@
             <a:r>
               <a:t/>
             </a:r>
-            <a:endParaRPr sz="1550">
+            <a:endParaRPr b="0" i="0" sz="1550" u="none" cap="none" strike="noStrike">
               <a:solidFill>
                 <a:srgbClr val="0A0A0A"/>
               </a:solidFill>
@@ -15248,7 +15798,7 @@
       </p:grpSpPr>
       <p:sp>
         <p:nvSpPr>
-          <p:cNvPr id="106" name="Google Shape;106;p20"/>
+          <p:cNvPr id="106" name="Google Shape;106;g3e04a08467b_0_7"/>
           <p:cNvSpPr txBox="1"/>
           <p:nvPr>
             <p:ph type="title"/>
@@ -15296,7 +15846,7 @@
       </p:sp>
       <p:pic>
         <p:nvPicPr>
-          <p:cNvPr id="107" name="Google Shape;107;p20"/>
+          <p:cNvPr id="107" name="Google Shape;107;g3e04a08467b_0_7"/>
           <p:cNvPicPr preferRelativeResize="0"/>
           <p:nvPr/>
         </p:nvPicPr>
@@ -15348,7 +15898,7 @@
       </p:grpSpPr>
       <p:sp>
         <p:nvSpPr>
-          <p:cNvPr id="112" name="Google Shape;112;p21"/>
+          <p:cNvPr id="112" name="Google Shape;112;p3"/>
           <p:cNvSpPr txBox="1"/>
           <p:nvPr>
             <p:ph type="title"/>
@@ -15396,17 +15946,16 @@
       </p:sp>
       <p:pic>
         <p:nvPicPr>
-          <p:cNvPr id="113" name="Google Shape;113;p21"/>
+          <p:cNvPr id="113" name="Google Shape;113;p3"/>
           <p:cNvPicPr preferRelativeResize="0"/>
           <p:nvPr/>
         </p:nvPicPr>
-        <p:blipFill>
+        <p:blipFill rotWithShape="1">
           <a:blip r:embed="rId3">
             <a:alphaModFix/>
           </a:blip>
-          <a:stretch>
-            <a:fillRect/>
-          </a:stretch>
+          <a:srcRect b="0" l="0" r="0" t="0"/>
+          <a:stretch/>
         </p:blipFill>
         <p:spPr>
           <a:xfrm>
